--- a/Reasonix配置迁移升级助手.pptx
+++ b/Reasonix配置迁移升级助手.pptx
@@ -14,6 +14,9 @@
     <p:sldId id="262" r:id="rId13"/>
     <p:sldId id="263" r:id="rId14"/>
     <p:sldId id="264" r:id="rId15"/>
+    <p:sldId id="265" r:id="rId16"/>
+    <p:sldId id="266" r:id="rId17"/>
+    <p:sldId id="267" r:id="rId18"/>
   </p:sldIdLst>
   <p:sldSz cx="12188952" cy="6858000" type="screen4x3"/>
   <p:notesSz cx="6858000" cy="9144000"/>
@@ -3092,7 +3095,7 @@
     <p:bg>
       <p:bgPr>
         <a:solidFill>
-          <a:srgbClr val="1A1A2E"/>
+          <a:srgbClr val="0F1423"/>
         </a:solidFill>
         <a:effectLst/>
       </p:bgPr>
@@ -3112,7 +3115,7 @@
         </p:nvSpPr>
         <p:spPr>
           <a:xfrm>
-            <a:off x="914400" y="1828800"/>
+            <a:off x="914400" y="1371600"/>
             <a:ext cx="10332720" cy="1828800"/>
           </a:xfrm>
           <a:prstGeom prst="rect">
@@ -3121,13 +3124,13 @@
           <a:noFill/>
         </p:spPr>
         <p:txBody>
-          <a:bodyPr wrap="square">
+          <a:bodyPr wrap="none">
             <a:spAutoFit/>
           </a:bodyPr>
           <a:lstStyle/>
           <a:p>
             <a:pPr algn="ctr">
-              <a:defRPr sz="4800" b="1">
+              <a:defRPr sz="5000" b="1">
                 <a:solidFill>
                   <a:srgbClr val="FFFFFF"/>
                 </a:solidFill>
@@ -3139,14 +3142,17 @@
           </a:p>
           <a:p>
             <a:pPr algn="ctr">
-              <a:defRPr sz="2400">
-                <a:solidFill>
-                  <a:srgbClr val="CCCCCC"/>
-                </a:solidFill>
-              </a:defRPr>
-            </a:pPr>
-            <a:r>
-              <a:t>从 0.53 到新版，一键迁移，旧对话不丢失</a:t>
+              <a:spcBef>
+                <a:spcPts val="1200"/>
+              </a:spcBef>
+              <a:defRPr sz="2200">
+                <a:solidFill>
+                  <a:srgbClr val="4FC3F7"/>
+                </a:solidFill>
+              </a:defRPr>
+            </a:pPr>
+            <a:r>
+              <a:t>从 0.53 到 1.X，扒源码 · 反推格式 · 346 行 PowerShell</a:t>
             </a:r>
           </a:p>
         </p:txBody>
@@ -3159,8 +3165,8 @@
         </p:nvSpPr>
         <p:spPr>
           <a:xfrm>
-            <a:off x="914400" y="5029200"/>
-            <a:ext cx="10332720" cy="914400"/>
+            <a:off x="914400" y="4114800"/>
+            <a:ext cx="10332720" cy="1371600"/>
           </a:xfrm>
           <a:prstGeom prst="rect">
             <a:avLst/>
@@ -3174,6 +3180,21 @@
           <a:lstStyle/>
           <a:p>
             <a:pPr algn="ctr">
+              <a:defRPr sz="2800">
+                <a:solidFill>
+                  <a:srgbClr val="999999"/>
+                </a:solidFill>
+              </a:defRPr>
+            </a:pPr>
+            <a:r>
+              <a:t>把一百轮旧对话，完整搬进新版</a:t>
+            </a:r>
+          </a:p>
+          <a:p>
+            <a:pPr algn="ctr">
+              <a:spcBef>
+                <a:spcPts val="3000"/>
+              </a:spcBef>
               <a:defRPr sz="1600">
                 <a:solidFill>
                   <a:srgbClr val="88AAFF"/>
@@ -3182,6 +3203,1462 @@
             </a:pPr>
             <a:r>
               <a:t>github.com/CS-Faith/reasonix-migration-assistant</a:t>
+            </a:r>
+          </a:p>
+        </p:txBody>
+      </p:sp>
+    </p:spTree>
+  </p:cSld>
+  <p:clrMapOvr>
+    <a:masterClrMapping/>
+  </p:clrMapOvr>
+</p:sld>
+</file>
+
+<file path=ppt/slides/slide10.xml><?xml version="1.0" encoding="utf-8"?>
+<p:sld xmlns:a="http://schemas.openxmlformats.org/drawingml/2006/main" xmlns:p="http://schemas.openxmlformats.org/presentationml/2006/main" xmlns:r="http://schemas.openxmlformats.org/officeDocument/2006/relationships">
+  <p:cSld>
+    <p:bg>
+      <p:bgPr>
+        <a:solidFill>
+          <a:srgbClr val="F7F8FC"/>
+        </a:solidFill>
+        <a:effectLst/>
+      </p:bgPr>
+    </p:bg>
+    <p:spTree>
+      <p:nvGrpSpPr>
+        <p:cNvPr id="1" name=""/>
+        <p:cNvGrpSpPr/>
+        <p:nvPr/>
+      </p:nvGrpSpPr>
+      <p:grpSpPr/>
+      <p:sp>
+        <p:nvSpPr>
+          <p:cNvPr id="2" name="Rectangle 1"/>
+          <p:cNvSpPr/>
+          <p:nvPr/>
+        </p:nvSpPr>
+        <p:spPr>
+          <a:xfrm>
+            <a:off x="0" y="0"/>
+            <a:ext cx="12188952" cy="1005840"/>
+          </a:xfrm>
+          <a:prstGeom prst="rect">
+            <a:avLst/>
+          </a:prstGeom>
+          <a:solidFill>
+            <a:srgbClr val="1A1A2E"/>
+          </a:solidFill>
+          <a:ln>
+            <a:noFill/>
+          </a:ln>
+        </p:spPr>
+        <p:style>
+          <a:lnRef idx="1">
+            <a:schemeClr val="accent1"/>
+          </a:lnRef>
+          <a:fillRef idx="3">
+            <a:schemeClr val="accent1"/>
+          </a:fillRef>
+          <a:effectRef idx="2">
+            <a:schemeClr val="accent1"/>
+          </a:effectRef>
+          <a:fontRef idx="minor">
+            <a:schemeClr val="lt1"/>
+          </a:fontRef>
+        </p:style>
+        <p:txBody>
+          <a:bodyPr rtlCol="0" anchor="ctr" wrap="square"/>
+          <a:lstStyle/>
+          <a:p>
+            <a:pPr algn="l">
+              <a:defRPr sz="3200" b="1">
+                <a:solidFill>
+                  <a:srgbClr val="FFFFFF"/>
+                </a:solidFill>
+              </a:defRPr>
+            </a:pPr>
+            <a:r>
+              <a:t>  使用方法 — 场景二：便携版升级</a:t>
+            </a:r>
+          </a:p>
+        </p:txBody>
+      </p:sp>
+      <p:sp>
+        <p:nvSpPr>
+          <p:cNvPr id="3" name="TextBox 2"/>
+          <p:cNvSpPr txBox="1"/>
+          <p:nvPr/>
+        </p:nvSpPr>
+        <p:spPr>
+          <a:xfrm>
+            <a:off x="731520" y="1280160"/>
+            <a:ext cx="10698480" cy="5029200"/>
+          </a:xfrm>
+          <a:prstGeom prst="rect">
+            <a:avLst/>
+          </a:prstGeom>
+          <a:noFill/>
+        </p:spPr>
+        <p:txBody>
+          <a:bodyPr wrap="square">
+            <a:spAutoFit/>
+          </a:bodyPr>
+          <a:lstStyle/>
+          <a:p/>
+          <a:p>
+            <a:pPr>
+              <a:spcAft>
+                <a:spcPts val="400"/>
+              </a:spcAft>
+            </a:pPr>
+          </a:p>
+          <a:p>
+            <a:pPr>
+              <a:defRPr sz="2200" b="1">
+                <a:solidFill>
+                  <a:srgbClr val="4FC3F7"/>
+                </a:solidFill>
+              </a:defRPr>
+            </a:pPr>
+            <a:r>
+              <a:t>💾  适用：U 盘 / 同步盘便携版 0.53</a:t>
+            </a:r>
+          </a:p>
+          <a:p>
+            <a:pPr>
+              <a:spcAft>
+                <a:spcPts val="600"/>
+              </a:spcAft>
+            </a:pPr>
+          </a:p>
+          <a:p>
+            <a:pPr>
+              <a:spcAft>
+                <a:spcPts val="400"/>
+              </a:spcAft>
+            </a:pPr>
+          </a:p>
+          <a:p>
+            <a:pPr>
+              <a:defRPr sz="2000" b="1">
+                <a:solidFill>
+                  <a:srgbClr val="4FC3F7"/>
+                </a:solidFill>
+              </a:defRPr>
+            </a:pPr>
+            <a:r>
+              <a:t>1  把 bat + ps1 两个文件复制到便携版 Reasonix 根目录</a:t>
+            </a:r>
+          </a:p>
+          <a:p>
+            <a:pPr>
+              <a:spcAft>
+                <a:spcPts val="400"/>
+              </a:spcAft>
+            </a:pPr>
+          </a:p>
+          <a:p>
+            <a:pPr>
+              <a:defRPr sz="2000" b="1">
+                <a:solidFill>
+                  <a:srgbClr val="4FC3F7"/>
+                </a:solidFill>
+              </a:defRPr>
+            </a:pPr>
+            <a:r>
+              <a:t>2  在便携版目录内双击 bat → 选择 [2]</a:t>
+            </a:r>
+          </a:p>
+          <a:p>
+            <a:pPr>
+              <a:spcAft>
+                <a:spcPts val="400"/>
+              </a:spcAft>
+            </a:pPr>
+          </a:p>
+          <a:p>
+            <a:pPr>
+              <a:defRPr sz="2000" b="1">
+                <a:solidFill>
+                  <a:srgbClr val="4FC3F7"/>
+                </a:solidFill>
+              </a:defRPr>
+            </a:pPr>
+            <a:r>
+              <a:t>3  工具自动读取当前目录的 .reasonix 数据</a:t>
+            </a:r>
+          </a:p>
+          <a:p>
+            <a:pPr>
+              <a:spcAft>
+                <a:spcPts val="400"/>
+              </a:spcAft>
+            </a:pPr>
+          </a:p>
+          <a:p>
+            <a:pPr>
+              <a:defRPr sz="2000" b="1">
+                <a:solidFill>
+                  <a:srgbClr val="4FC3F7"/>
+                </a:solidFill>
+              </a:defRPr>
+            </a:pPr>
+            <a:r>
+              <a:t>4  启动新版 Reasonix → 点击「历史对话」</a:t>
+            </a:r>
+          </a:p>
+          <a:p>
+            <a:pPr>
+              <a:spcAft>
+                <a:spcPts val="1000"/>
+              </a:spcAft>
+            </a:pPr>
+          </a:p>
+          <a:p>
+            <a:pPr>
+              <a:spcAft>
+                <a:spcPts val="400"/>
+              </a:spcAft>
+            </a:pPr>
+          </a:p>
+          <a:p>
+            <a:pPr>
+              <a:defRPr sz="2000" b="1">
+                <a:solidFill>
+                  <a:srgbClr val="4FC3F7"/>
+                </a:solidFill>
+              </a:defRPr>
+            </a:pPr>
+            <a:r>
+              <a:t>⚠  注意</a:t>
+            </a:r>
+          </a:p>
+          <a:p>
+            <a:pPr>
+              <a:spcAft>
+                <a:spcPts val="200"/>
+              </a:spcAft>
+              <a:defRPr sz="1800">
+                <a:solidFill>
+                  <a:srgbClr val="2D2D3F"/>
+                </a:solidFill>
+              </a:defRPr>
+            </a:pPr>
+            <a:r>
+              <a:t>     bat 文件必须放在便携版根目录下运行</a:t>
+            </a:r>
+          </a:p>
+          <a:p>
+            <a:pPr>
+              <a:spcAft>
+                <a:spcPts val="200"/>
+              </a:spcAft>
+              <a:defRPr sz="1800">
+                <a:solidFill>
+                  <a:srgbClr val="2D2D3F"/>
+                </a:solidFill>
+              </a:defRPr>
+            </a:pPr>
+            <a:r>
+              <a:t>     不要在 C 盘迁移工具目录下选 [2]——那边没有便携版数据</a:t>
+            </a:r>
+          </a:p>
+        </p:txBody>
+      </p:sp>
+      <p:sp>
+        <p:nvSpPr>
+          <p:cNvPr id="4" name="TextBox 3"/>
+          <p:cNvSpPr txBox="1"/>
+          <p:nvPr/>
+        </p:nvSpPr>
+        <p:spPr>
+          <a:xfrm>
+            <a:off x="457200" y="6400800"/>
+            <a:ext cx="11247120" cy="365760"/>
+          </a:xfrm>
+          <a:prstGeom prst="rect">
+            <a:avLst/>
+          </a:prstGeom>
+          <a:noFill/>
+        </p:spPr>
+        <p:txBody>
+          <a:bodyPr wrap="none">
+            <a:spAutoFit/>
+          </a:bodyPr>
+          <a:lstStyle/>
+          <a:p>
+            <a:pPr algn="r">
+              <a:defRPr sz="1000">
+                <a:solidFill>
+                  <a:srgbClr val="999999"/>
+                </a:solidFill>
+              </a:defRPr>
+            </a:pPr>
+            <a:r>
+              <a:t>Reasonix Migration Assistant  |  github.com/CS-Faith/reasonix-migration-assistant</a:t>
+            </a:r>
+          </a:p>
+        </p:txBody>
+      </p:sp>
+    </p:spTree>
+  </p:cSld>
+  <p:clrMapOvr>
+    <a:masterClrMapping/>
+  </p:clrMapOvr>
+</p:sld>
+</file>
+
+<file path=ppt/slides/slide11.xml><?xml version="1.0" encoding="utf-8"?>
+<p:sld xmlns:a="http://schemas.openxmlformats.org/drawingml/2006/main" xmlns:p="http://schemas.openxmlformats.org/presentationml/2006/main" xmlns:r="http://schemas.openxmlformats.org/officeDocument/2006/relationships">
+  <p:cSld>
+    <p:bg>
+      <p:bgPr>
+        <a:solidFill>
+          <a:srgbClr val="F7F8FC"/>
+        </a:solidFill>
+        <a:effectLst/>
+      </p:bgPr>
+    </p:bg>
+    <p:spTree>
+      <p:nvGrpSpPr>
+        <p:cNvPr id="1" name=""/>
+        <p:cNvGrpSpPr/>
+        <p:nvPr/>
+      </p:nvGrpSpPr>
+      <p:grpSpPr/>
+      <p:sp>
+        <p:nvSpPr>
+          <p:cNvPr id="2" name="Rectangle 1"/>
+          <p:cNvSpPr/>
+          <p:nvPr/>
+        </p:nvSpPr>
+        <p:spPr>
+          <a:xfrm>
+            <a:off x="0" y="0"/>
+            <a:ext cx="12188952" cy="1005840"/>
+          </a:xfrm>
+          <a:prstGeom prst="rect">
+            <a:avLst/>
+          </a:prstGeom>
+          <a:solidFill>
+            <a:srgbClr val="1A1A2E"/>
+          </a:solidFill>
+          <a:ln>
+            <a:noFill/>
+          </a:ln>
+        </p:spPr>
+        <p:style>
+          <a:lnRef idx="1">
+            <a:schemeClr val="accent1"/>
+          </a:lnRef>
+          <a:fillRef idx="3">
+            <a:schemeClr val="accent1"/>
+          </a:fillRef>
+          <a:effectRef idx="2">
+            <a:schemeClr val="accent1"/>
+          </a:effectRef>
+          <a:fontRef idx="minor">
+            <a:schemeClr val="lt1"/>
+          </a:fontRef>
+        </p:style>
+        <p:txBody>
+          <a:bodyPr rtlCol="0" anchor="ctr" wrap="square"/>
+          <a:lstStyle/>
+          <a:p>
+            <a:pPr algn="l">
+              <a:defRPr sz="3200" b="1">
+                <a:solidFill>
+                  <a:srgbClr val="FFFFFF"/>
+                </a:solidFill>
+              </a:defRPr>
+            </a:pPr>
+            <a:r>
+              <a:t>  总结：踩过的坑 = 学到的经验</a:t>
+            </a:r>
+          </a:p>
+        </p:txBody>
+      </p:sp>
+      <p:sp>
+        <p:nvSpPr>
+          <p:cNvPr id="3" name="TextBox 2"/>
+          <p:cNvSpPr txBox="1"/>
+          <p:nvPr/>
+        </p:nvSpPr>
+        <p:spPr>
+          <a:xfrm>
+            <a:off x="457200" y="1188720"/>
+            <a:ext cx="11247120" cy="5029200"/>
+          </a:xfrm>
+          <a:prstGeom prst="rect">
+            <a:avLst/>
+          </a:prstGeom>
+          <a:noFill/>
+        </p:spPr>
+        <p:txBody>
+          <a:bodyPr wrap="square">
+            <a:spAutoFit/>
+          </a:bodyPr>
+          <a:lstStyle/>
+          <a:p/>
+        </p:txBody>
+      </p:sp>
+      <p:sp>
+        <p:nvSpPr>
+          <p:cNvPr id="4" name="TextBox 3"/>
+          <p:cNvSpPr txBox="1"/>
+          <p:nvPr/>
+        </p:nvSpPr>
+        <p:spPr>
+          <a:xfrm>
+            <a:off x="457200" y="1645920"/>
+            <a:ext cx="2651760" cy="548640"/>
+          </a:xfrm>
+          <a:prstGeom prst="rect">
+            <a:avLst/>
+          </a:prstGeom>
+          <a:noFill/>
+        </p:spPr>
+        <p:txBody>
+          <a:bodyPr wrap="square">
+            <a:spAutoFit/>
+          </a:bodyPr>
+          <a:lstStyle/>
+          <a:p>
+            <a:pPr algn="ctr">
+              <a:defRPr sz="1800" b="1">
+                <a:solidFill>
+                  <a:srgbClr val="FFFFFF"/>
+                </a:solidFill>
+              </a:defRPr>
+            </a:pPr>
+            <a:r>
+              <a:t>坑</a:t>
+            </a:r>
+          </a:p>
+        </p:txBody>
+      </p:sp>
+      <p:sp>
+        <p:nvSpPr>
+          <p:cNvPr id="5" name="TextBox 4"/>
+          <p:cNvSpPr txBox="1"/>
+          <p:nvPr/>
+        </p:nvSpPr>
+        <p:spPr>
+          <a:xfrm>
+            <a:off x="3291840" y="1645920"/>
+            <a:ext cx="2651760" cy="548640"/>
+          </a:xfrm>
+          <a:prstGeom prst="rect">
+            <a:avLst/>
+          </a:prstGeom>
+          <a:noFill/>
+        </p:spPr>
+        <p:txBody>
+          <a:bodyPr wrap="square">
+            <a:spAutoFit/>
+          </a:bodyPr>
+          <a:lstStyle/>
+          <a:p>
+            <a:pPr algn="ctr">
+              <a:defRPr sz="1800" b="1">
+                <a:solidFill>
+                  <a:srgbClr val="FFFFFF"/>
+                </a:solidFill>
+              </a:defRPr>
+            </a:pPr>
+            <a:r>
+              <a:t>根因</a:t>
+            </a:r>
+          </a:p>
+        </p:txBody>
+      </p:sp>
+      <p:sp>
+        <p:nvSpPr>
+          <p:cNvPr id="6" name="TextBox 5"/>
+          <p:cNvSpPr txBox="1"/>
+          <p:nvPr/>
+        </p:nvSpPr>
+        <p:spPr>
+          <a:xfrm>
+            <a:off x="6126480" y="1645920"/>
+            <a:ext cx="2651760" cy="548640"/>
+          </a:xfrm>
+          <a:prstGeom prst="rect">
+            <a:avLst/>
+          </a:prstGeom>
+          <a:noFill/>
+        </p:spPr>
+        <p:txBody>
+          <a:bodyPr wrap="square">
+            <a:spAutoFit/>
+          </a:bodyPr>
+          <a:lstStyle/>
+          <a:p>
+            <a:pPr algn="ctr">
+              <a:defRPr sz="1800" b="1">
+                <a:solidFill>
+                  <a:srgbClr val="FFFFFF"/>
+                </a:solidFill>
+              </a:defRPr>
+            </a:pPr>
+            <a:r>
+              <a:t>方案</a:t>
+            </a:r>
+          </a:p>
+        </p:txBody>
+      </p:sp>
+      <p:sp>
+        <p:nvSpPr>
+          <p:cNvPr id="7" name="TextBox 6"/>
+          <p:cNvSpPr txBox="1"/>
+          <p:nvPr/>
+        </p:nvSpPr>
+        <p:spPr>
+          <a:xfrm>
+            <a:off x="8961120" y="1645920"/>
+            <a:ext cx="2651760" cy="548640"/>
+          </a:xfrm>
+          <a:prstGeom prst="rect">
+            <a:avLst/>
+          </a:prstGeom>
+          <a:noFill/>
+        </p:spPr>
+        <p:txBody>
+          <a:bodyPr wrap="square">
+            <a:spAutoFit/>
+          </a:bodyPr>
+          <a:lstStyle/>
+          <a:p>
+            <a:pPr algn="ctr">
+              <a:defRPr sz="1800" b="1">
+                <a:solidFill>
+                  <a:srgbClr val="FFFFFF"/>
+                </a:solidFill>
+              </a:defRPr>
+            </a:pPr>
+            <a:r>
+              <a:t>耗时</a:t>
+            </a:r>
+          </a:p>
+        </p:txBody>
+      </p:sp>
+      <p:sp>
+        <p:nvSpPr>
+          <p:cNvPr id="8" name="Rectangle 7"/>
+          <p:cNvSpPr/>
+          <p:nvPr/>
+        </p:nvSpPr>
+        <p:spPr>
+          <a:xfrm>
+            <a:off x="457200" y="1600200"/>
+            <a:ext cx="11247120" cy="502920"/>
+          </a:xfrm>
+          <a:prstGeom prst="rect">
+            <a:avLst/>
+          </a:prstGeom>
+          <a:solidFill>
+            <a:srgbClr val="1A1A2E"/>
+          </a:solidFill>
+          <a:ln>
+            <a:noFill/>
+          </a:ln>
+        </p:spPr>
+        <p:style>
+          <a:lnRef idx="1">
+            <a:schemeClr val="accent1"/>
+          </a:lnRef>
+          <a:fillRef idx="3">
+            <a:schemeClr val="accent1"/>
+          </a:fillRef>
+          <a:effectRef idx="2">
+            <a:schemeClr val="accent1"/>
+          </a:effectRef>
+          <a:fontRef idx="minor">
+            <a:schemeClr val="lt1"/>
+          </a:fontRef>
+        </p:style>
+        <p:txBody>
+          <a:bodyPr rtlCol="0" anchor="ctr"/>
+          <a:lstStyle/>
+          <a:p>
+            <a:pPr algn="ctr"/>
+          </a:p>
+        </p:txBody>
+      </p:sp>
+      <p:sp>
+        <p:nvSpPr>
+          <p:cNvPr id="9" name="TextBox 8"/>
+          <p:cNvSpPr txBox="1"/>
+          <p:nvPr/>
+        </p:nvSpPr>
+        <p:spPr>
+          <a:xfrm>
+            <a:off x="457200" y="2240280"/>
+            <a:ext cx="2651760" cy="548640"/>
+          </a:xfrm>
+          <a:prstGeom prst="rect">
+            <a:avLst/>
+          </a:prstGeom>
+          <a:noFill/>
+        </p:spPr>
+        <p:txBody>
+          <a:bodyPr wrap="square">
+            <a:spAutoFit/>
+          </a:bodyPr>
+          <a:lstStyle/>
+          <a:p>
+            <a:pPr algn="ctr">
+              <a:defRPr sz="1600" b="0">
+                <a:solidFill>
+                  <a:srgbClr val="2D2D3F"/>
+                </a:solidFill>
+              </a:defRPr>
+            </a:pPr>
+            <a:r>
+              <a:t>meta 字段名</a:t>
+            </a:r>
+          </a:p>
+        </p:txBody>
+      </p:sp>
+      <p:sp>
+        <p:nvSpPr>
+          <p:cNvPr id="10" name="TextBox 9"/>
+          <p:cNvSpPr txBox="1"/>
+          <p:nvPr/>
+        </p:nvSpPr>
+        <p:spPr>
+          <a:xfrm>
+            <a:off x="3291840" y="2240280"/>
+            <a:ext cx="2651760" cy="548640"/>
+          </a:xfrm>
+          <a:prstGeom prst="rect">
+            <a:avLst/>
+          </a:prstGeom>
+          <a:noFill/>
+        </p:spPr>
+        <p:txBody>
+          <a:bodyPr wrap="square">
+            <a:spAutoFit/>
+          </a:bodyPr>
+          <a:lstStyle/>
+          <a:p>
+            <a:pPr algn="ctr">
+              <a:defRPr sz="1600" b="0">
+                <a:solidFill>
+                  <a:srgbClr val="2D2D3F"/>
+                </a:solidFill>
+              </a:defRPr>
+            </a:pPr>
+            <a:r>
+              <a:t>Go struct tag 是 snake_case</a:t>
+            </a:r>
+          </a:p>
+        </p:txBody>
+      </p:sp>
+      <p:sp>
+        <p:nvSpPr>
+          <p:cNvPr id="11" name="TextBox 10"/>
+          <p:cNvSpPr txBox="1"/>
+          <p:nvPr/>
+        </p:nvSpPr>
+        <p:spPr>
+          <a:xfrm>
+            <a:off x="6126480" y="2240280"/>
+            <a:ext cx="2651760" cy="548640"/>
+          </a:xfrm>
+          <a:prstGeom prst="rect">
+            <a:avLst/>
+          </a:prstGeom>
+          <a:noFill/>
+        </p:spPr>
+        <p:txBody>
+          <a:bodyPr wrap="square">
+            <a:spAutoFit/>
+          </a:bodyPr>
+          <a:lstStyle/>
+          <a:p>
+            <a:pPr algn="ctr">
+              <a:defRPr sz="1600" b="0">
+                <a:solidFill>
+                  <a:srgbClr val="2D2D3F"/>
+                </a:solidFill>
+              </a:defRPr>
+            </a:pPr>
+            <a:r>
+              <a:t>抄源码字段名</a:t>
+            </a:r>
+          </a:p>
+        </p:txBody>
+      </p:sp>
+      <p:sp>
+        <p:nvSpPr>
+          <p:cNvPr id="12" name="TextBox 11"/>
+          <p:cNvSpPr txBox="1"/>
+          <p:nvPr/>
+        </p:nvSpPr>
+        <p:spPr>
+          <a:xfrm>
+            <a:off x="8961120" y="2240280"/>
+            <a:ext cx="2651760" cy="548640"/>
+          </a:xfrm>
+          <a:prstGeom prst="rect">
+            <a:avLst/>
+          </a:prstGeom>
+          <a:noFill/>
+        </p:spPr>
+        <p:txBody>
+          <a:bodyPr wrap="square">
+            <a:spAutoFit/>
+          </a:bodyPr>
+          <a:lstStyle/>
+          <a:p>
+            <a:pPr algn="ctr">
+              <a:defRPr sz="1600" b="0">
+                <a:solidFill>
+                  <a:srgbClr val="2D2D3F"/>
+                </a:solidFill>
+              </a:defRPr>
+            </a:pPr>
+            <a:r>
+              <a:t>1h</a:t>
+            </a:r>
+          </a:p>
+        </p:txBody>
+      </p:sp>
+      <p:sp>
+        <p:nvSpPr>
+          <p:cNvPr id="13" name="TextBox 12"/>
+          <p:cNvSpPr txBox="1"/>
+          <p:nvPr/>
+        </p:nvSpPr>
+        <p:spPr>
+          <a:xfrm>
+            <a:off x="457200" y="2834640"/>
+            <a:ext cx="2651760" cy="548640"/>
+          </a:xfrm>
+          <a:prstGeom prst="rect">
+            <a:avLst/>
+          </a:prstGeom>
+          <a:noFill/>
+        </p:spPr>
+        <p:txBody>
+          <a:bodyPr wrap="square">
+            <a:spAutoFit/>
+          </a:bodyPr>
+          <a:lstStyle/>
+          <a:p>
+            <a:pPr algn="ctr">
+              <a:defRPr sz="1600" b="0">
+                <a:solidFill>
+                  <a:srgbClr val="2D2D3F"/>
+                </a:solidFill>
+              </a:defRPr>
+            </a:pPr>
+            <a:r>
+              <a:t>telemetry 不显示</a:t>
+            </a:r>
+          </a:p>
+        </p:txBody>
+      </p:sp>
+      <p:sp>
+        <p:nvSpPr>
+          <p:cNvPr id="14" name="TextBox 13"/>
+          <p:cNvSpPr txBox="1"/>
+          <p:nvPr/>
+        </p:nvSpPr>
+        <p:spPr>
+          <a:xfrm>
+            <a:off x="3291840" y="2834640"/>
+            <a:ext cx="2651760" cy="548640"/>
+          </a:xfrm>
+          <a:prstGeom prst="rect">
+            <a:avLst/>
+          </a:prstGeom>
+          <a:noFill/>
+        </p:spPr>
+        <p:txBody>
+          <a:bodyPr wrap="square">
+            <a:spAutoFit/>
+          </a:bodyPr>
+          <a:lstStyle/>
+          <a:p>
+            <a:pPr algn="ctr">
+              <a:defRPr sz="1600" b="0">
+                <a:solidFill>
+                  <a:srgbClr val="2D2D3F"/>
+                </a:solidFill>
+              </a:defRPr>
+            </a:pPr>
+            <a:r>
+              <a:t>requestCount:0 不触发加载</a:t>
+            </a:r>
+          </a:p>
+        </p:txBody>
+      </p:sp>
+      <p:sp>
+        <p:nvSpPr>
+          <p:cNvPr id="15" name="TextBox 14"/>
+          <p:cNvSpPr txBox="1"/>
+          <p:nvPr/>
+        </p:nvSpPr>
+        <p:spPr>
+          <a:xfrm>
+            <a:off x="6126480" y="2834640"/>
+            <a:ext cx="2651760" cy="548640"/>
+          </a:xfrm>
+          <a:prstGeom prst="rect">
+            <a:avLst/>
+          </a:prstGeom>
+          <a:noFill/>
+        </p:spPr>
+        <p:txBody>
+          <a:bodyPr wrap="square">
+            <a:spAutoFit/>
+          </a:bodyPr>
+          <a:lstStyle/>
+          <a:p>
+            <a:pPr algn="ctr">
+              <a:defRPr sz="1600" b="0">
+                <a:solidFill>
+                  <a:srgbClr val="2D2D3F"/>
+                </a:solidFill>
+              </a:defRPr>
+            </a:pPr>
+            <a:r>
+              <a:t>填 1</a:t>
+            </a:r>
+          </a:p>
+        </p:txBody>
+      </p:sp>
+      <p:sp>
+        <p:nvSpPr>
+          <p:cNvPr id="16" name="TextBox 15"/>
+          <p:cNvSpPr txBox="1"/>
+          <p:nvPr/>
+        </p:nvSpPr>
+        <p:spPr>
+          <a:xfrm>
+            <a:off x="8961120" y="2834640"/>
+            <a:ext cx="2651760" cy="548640"/>
+          </a:xfrm>
+          <a:prstGeom prst="rect">
+            <a:avLst/>
+          </a:prstGeom>
+          <a:noFill/>
+        </p:spPr>
+        <p:txBody>
+          <a:bodyPr wrap="square">
+            <a:spAutoFit/>
+          </a:bodyPr>
+          <a:lstStyle/>
+          <a:p>
+            <a:pPr algn="ctr">
+              <a:defRPr sz="1600" b="0">
+                <a:solidFill>
+                  <a:srgbClr val="2D2D3F"/>
+                </a:solidFill>
+              </a:defRPr>
+            </a:pPr>
+            <a:r>
+              <a:t>30min</a:t>
+            </a:r>
+          </a:p>
+        </p:txBody>
+      </p:sp>
+      <p:sp>
+        <p:nvSpPr>
+          <p:cNvPr id="17" name="TextBox 16"/>
+          <p:cNvSpPr txBox="1"/>
+          <p:nvPr/>
+        </p:nvSpPr>
+        <p:spPr>
+          <a:xfrm>
+            <a:off x="457200" y="3429000"/>
+            <a:ext cx="2651760" cy="548640"/>
+          </a:xfrm>
+          <a:prstGeom prst="rect">
+            <a:avLst/>
+          </a:prstGeom>
+          <a:noFill/>
+        </p:spPr>
+        <p:txBody>
+          <a:bodyPr wrap="square">
+            <a:spAutoFit/>
+          </a:bodyPr>
+          <a:lstStyle/>
+          <a:p>
+            <a:pPr algn="ctr">
+              <a:defRPr sz="1600" b="0">
+                <a:solidFill>
+                  <a:srgbClr val="2D2D3F"/>
+                </a:solidFill>
+              </a:defRPr>
+            </a:pPr>
+            <a:r>
+              <a:t>会话打不开</a:t>
+            </a:r>
+          </a:p>
+        </p:txBody>
+      </p:sp>
+      <p:sp>
+        <p:nvSpPr>
+          <p:cNvPr id="18" name="TextBox 17"/>
+          <p:cNvSpPr txBox="1"/>
+          <p:nvPr/>
+        </p:nvSpPr>
+        <p:spPr>
+          <a:xfrm>
+            <a:off x="3291840" y="3429000"/>
+            <a:ext cx="2651760" cy="548640"/>
+          </a:xfrm>
+          <a:prstGeom prst="rect">
+            <a:avLst/>
+          </a:prstGeom>
+          <a:noFill/>
+        </p:spPr>
+        <p:txBody>
+          <a:bodyPr wrap="square">
+            <a:spAutoFit/>
+          </a:bodyPr>
+          <a:lstStyle/>
+          <a:p>
+            <a:pPr algn="ctr">
+              <a:defRPr sz="1600" b="0">
+                <a:solidFill>
+                  <a:srgbClr val="2D2D3F"/>
+                </a:solidFill>
+              </a:defRPr>
+            </a:pPr>
+            <a:r>
+              <a:t>PowerShell BOM vs Go json</a:t>
+            </a:r>
+          </a:p>
+        </p:txBody>
+      </p:sp>
+      <p:sp>
+        <p:nvSpPr>
+          <p:cNvPr id="19" name="TextBox 18"/>
+          <p:cNvSpPr txBox="1"/>
+          <p:nvPr/>
+        </p:nvSpPr>
+        <p:spPr>
+          <a:xfrm>
+            <a:off x="6126480" y="3429000"/>
+            <a:ext cx="2651760" cy="548640"/>
+          </a:xfrm>
+          <a:prstGeom prst="rect">
+            <a:avLst/>
+          </a:prstGeom>
+          <a:noFill/>
+        </p:spPr>
+        <p:txBody>
+          <a:bodyPr wrap="square">
+            <a:spAutoFit/>
+          </a:bodyPr>
+          <a:lstStyle/>
+          <a:p>
+            <a:pPr algn="ctr">
+              <a:defRPr sz="1600" b="0">
+                <a:solidFill>
+                  <a:srgbClr val="2D2D3F"/>
+                </a:solidFill>
+              </a:defRPr>
+            </a:pPr>
+            <a:r>
+              <a:t>无BOM编码写文件</a:t>
+            </a:r>
+          </a:p>
+        </p:txBody>
+      </p:sp>
+      <p:sp>
+        <p:nvSpPr>
+          <p:cNvPr id="20" name="TextBox 19"/>
+          <p:cNvSpPr txBox="1"/>
+          <p:nvPr/>
+        </p:nvSpPr>
+        <p:spPr>
+          <a:xfrm>
+            <a:off x="8961120" y="3429000"/>
+            <a:ext cx="2651760" cy="548640"/>
+          </a:xfrm>
+          <a:prstGeom prst="rect">
+            <a:avLst/>
+          </a:prstGeom>
+          <a:noFill/>
+        </p:spPr>
+        <p:txBody>
+          <a:bodyPr wrap="square">
+            <a:spAutoFit/>
+          </a:bodyPr>
+          <a:lstStyle/>
+          <a:p>
+            <a:pPr algn="ctr">
+              <a:defRPr sz="1600" b="0">
+                <a:solidFill>
+                  <a:srgbClr val="2D2D3F"/>
+                </a:solidFill>
+              </a:defRPr>
+            </a:pPr>
+            <a:r>
+              <a:t>2h</a:t>
+            </a:r>
+          </a:p>
+        </p:txBody>
+      </p:sp>
+      <p:sp>
+        <p:nvSpPr>
+          <p:cNvPr id="21" name="TextBox 20"/>
+          <p:cNvSpPr txBox="1"/>
+          <p:nvPr/>
+        </p:nvSpPr>
+        <p:spPr>
+          <a:xfrm>
+            <a:off x="457200" y="4023360"/>
+            <a:ext cx="2651760" cy="548640"/>
+          </a:xfrm>
+          <a:prstGeom prst="rect">
+            <a:avLst/>
+          </a:prstGeom>
+          <a:noFill/>
+        </p:spPr>
+        <p:txBody>
+          <a:bodyPr wrap="square">
+            <a:spAutoFit/>
+          </a:bodyPr>
+          <a:lstStyle/>
+          <a:p>
+            <a:pPr algn="ctr">
+              <a:defRPr sz="1600" b="0">
+                <a:solidFill>
+                  <a:srgbClr val="2D2D3F"/>
+                </a:solidFill>
+              </a:defRPr>
+            </a:pPr>
+            <a:r>
+              <a:t>侧边栏刷屏</a:t>
+            </a:r>
+          </a:p>
+        </p:txBody>
+      </p:sp>
+      <p:sp>
+        <p:nvSpPr>
+          <p:cNvPr id="22" name="TextBox 21"/>
+          <p:cNvSpPr txBox="1"/>
+          <p:nvPr/>
+        </p:nvSpPr>
+        <p:spPr>
+          <a:xfrm>
+            <a:off x="3291840" y="4023360"/>
+            <a:ext cx="2651760" cy="548640"/>
+          </a:xfrm>
+          <a:prstGeom prst="rect">
+            <a:avLst/>
+          </a:prstGeom>
+          <a:noFill/>
+        </p:spPr>
+        <p:txBody>
+          <a:bodyPr wrap="square">
+            <a:spAutoFit/>
+          </a:bodyPr>
+          <a:lstStyle/>
+          <a:p>
+            <a:pPr algn="ctr">
+              <a:defRPr sz="1600" b="0">
+                <a:solidFill>
+                  <a:srgbClr val="2D2D3F"/>
+                </a:solidFill>
+              </a:defRPr>
+            </a:pPr>
+            <a:r>
+              <a:t>orderedTopicIDs 遍历 titleMap</a:t>
+            </a:r>
+          </a:p>
+        </p:txBody>
+      </p:sp>
+      <p:sp>
+        <p:nvSpPr>
+          <p:cNvPr id="23" name="TextBox 22"/>
+          <p:cNvSpPr txBox="1"/>
+          <p:nvPr/>
+        </p:nvSpPr>
+        <p:spPr>
+          <a:xfrm>
+            <a:off x="6126480" y="4023360"/>
+            <a:ext cx="2651760" cy="548640"/>
+          </a:xfrm>
+          <a:prstGeom prst="rect">
+            <a:avLst/>
+          </a:prstGeom>
+          <a:noFill/>
+        </p:spPr>
+        <p:txBody>
+          <a:bodyPr wrap="square">
+            <a:spAutoFit/>
+          </a:bodyPr>
+          <a:lstStyle/>
+          <a:p>
+            <a:pPr algn="ctr">
+              <a:defRPr sz="1600" b="0">
+                <a:solidFill>
+                  <a:srgbClr val="2D2D3F"/>
+                </a:solidFill>
+              </a:defRPr>
+            </a:pPr>
+            <a:r>
+              <a:t>清空title文件+标记</a:t>
+            </a:r>
+          </a:p>
+        </p:txBody>
+      </p:sp>
+      <p:sp>
+        <p:nvSpPr>
+          <p:cNvPr id="24" name="TextBox 23"/>
+          <p:cNvSpPr txBox="1"/>
+          <p:nvPr/>
+        </p:nvSpPr>
+        <p:spPr>
+          <a:xfrm>
+            <a:off x="8961120" y="4023360"/>
+            <a:ext cx="2651760" cy="548640"/>
+          </a:xfrm>
+          <a:prstGeom prst="rect">
+            <a:avLst/>
+          </a:prstGeom>
+          <a:noFill/>
+        </p:spPr>
+        <p:txBody>
+          <a:bodyPr wrap="square">
+            <a:spAutoFit/>
+          </a:bodyPr>
+          <a:lstStyle/>
+          <a:p>
+            <a:pPr algn="ctr">
+              <a:defRPr sz="1600" b="0">
+                <a:solidFill>
+                  <a:srgbClr val="2D2D3F"/>
+                </a:solidFill>
+              </a:defRPr>
+            </a:pPr>
+            <a:r>
+              <a:t>3h</a:t>
+            </a:r>
+          </a:p>
+        </p:txBody>
+      </p:sp>
+      <p:sp>
+        <p:nvSpPr>
+          <p:cNvPr id="25" name="TextBox 24"/>
+          <p:cNvSpPr txBox="1"/>
+          <p:nvPr/>
+        </p:nvSpPr>
+        <p:spPr>
+          <a:xfrm>
+            <a:off x="457200" y="4617720"/>
+            <a:ext cx="2651760" cy="548640"/>
+          </a:xfrm>
+          <a:prstGeom prst="rect">
+            <a:avLst/>
+          </a:prstGeom>
+          <a:noFill/>
+        </p:spPr>
+        <p:txBody>
+          <a:bodyPr wrap="square">
+            <a:spAutoFit/>
+          </a:bodyPr>
+          <a:lstStyle/>
+          <a:p>
+            <a:pPr algn="ctr">
+              <a:defRPr sz="1600" b="0">
+                <a:solidFill>
+                  <a:srgbClr val="2D2D3F"/>
+                </a:solidFill>
+              </a:defRPr>
+            </a:pPr>
+            <a:r>
+              <a:t>标题全是你好</a:t>
+            </a:r>
+          </a:p>
+        </p:txBody>
+      </p:sp>
+      <p:sp>
+        <p:nvSpPr>
+          <p:cNvPr id="26" name="TextBox 25"/>
+          <p:cNvSpPr txBox="1"/>
+          <p:nvPr/>
+        </p:nvSpPr>
+        <p:spPr>
+          <a:xfrm>
+            <a:off x="3291840" y="4617720"/>
+            <a:ext cx="2651760" cy="548640"/>
+          </a:xfrm>
+          <a:prstGeom prst="rect">
+            <a:avLst/>
+          </a:prstGeom>
+          <a:noFill/>
+        </p:spPr>
+        <p:txBody>
+          <a:bodyPr wrap="square">
+            <a:spAutoFit/>
+          </a:bodyPr>
+          <a:lstStyle/>
+          <a:p>
+            <a:pPr algn="ctr">
+              <a:defRPr sz="1600" b="0">
+                <a:solidFill>
+                  <a:srgbClr val="2D2D3F"/>
+                </a:solidFill>
+              </a:defRPr>
+            </a:pPr>
+            <a:r>
+              <a:t>标题文件缺失</a:t>
+            </a:r>
+          </a:p>
+        </p:txBody>
+      </p:sp>
+      <p:sp>
+        <p:nvSpPr>
+          <p:cNvPr id="27" name="TextBox 26"/>
+          <p:cNvSpPr txBox="1"/>
+          <p:nvPr/>
+        </p:nvSpPr>
+        <p:spPr>
+          <a:xfrm>
+            <a:off x="6126480" y="4617720"/>
+            <a:ext cx="2651760" cy="548640"/>
+          </a:xfrm>
+          <a:prstGeom prst="rect">
+            <a:avLst/>
+          </a:prstGeom>
+          <a:noFill/>
+        </p:spPr>
+        <p:txBody>
+          <a:bodyPr wrap="square">
+            <a:spAutoFit/>
+          </a:bodyPr>
+          <a:lstStyle/>
+          <a:p>
+            <a:pPr algn="ctr">
+              <a:defRPr sz="1600" b="0">
+                <a:solidFill>
+                  <a:srgbClr val="2D2D3F"/>
+                </a:solidFill>
+              </a:defRPr>
+            </a:pPr>
+            <a:r>
+              <a:t>保留老版 summary</a:t>
+            </a:r>
+          </a:p>
+        </p:txBody>
+      </p:sp>
+      <p:sp>
+        <p:nvSpPr>
+          <p:cNvPr id="28" name="TextBox 27"/>
+          <p:cNvSpPr txBox="1"/>
+          <p:nvPr/>
+        </p:nvSpPr>
+        <p:spPr>
+          <a:xfrm>
+            <a:off x="8961120" y="4617720"/>
+            <a:ext cx="2651760" cy="548640"/>
+          </a:xfrm>
+          <a:prstGeom prst="rect">
+            <a:avLst/>
+          </a:prstGeom>
+          <a:noFill/>
+        </p:spPr>
+        <p:txBody>
+          <a:bodyPr wrap="square">
+            <a:spAutoFit/>
+          </a:bodyPr>
+          <a:lstStyle/>
+          <a:p>
+            <a:pPr algn="ctr">
+              <a:defRPr sz="1600" b="0">
+                <a:solidFill>
+                  <a:srgbClr val="2D2D3F"/>
+                </a:solidFill>
+              </a:defRPr>
+            </a:pPr>
+            <a:r>
+              <a:t>1h</a:t>
+            </a:r>
+          </a:p>
+        </p:txBody>
+      </p:sp>
+      <p:sp>
+        <p:nvSpPr>
+          <p:cNvPr id="29" name="TextBox 28"/>
+          <p:cNvSpPr txBox="1"/>
+          <p:nvPr/>
+        </p:nvSpPr>
+        <p:spPr>
+          <a:xfrm>
+            <a:off x="457200" y="5303520"/>
+            <a:ext cx="11247120" cy="1097280"/>
+          </a:xfrm>
+          <a:prstGeom prst="rect">
+            <a:avLst/>
+          </a:prstGeom>
+          <a:noFill/>
+        </p:spPr>
+        <p:txBody>
+          <a:bodyPr wrap="square">
+            <a:spAutoFit/>
+          </a:bodyPr>
+          <a:lstStyle/>
+          <a:p>
+            <a:pPr algn="ctr">
+              <a:defRPr sz="2000" b="1">
+                <a:solidFill>
+                  <a:srgbClr val="7C4DFF"/>
+                </a:solidFill>
+              </a:defRPr>
+            </a:pPr>
+            <a:r>
+              <a:t>核心原则：不猜 — 读源码。新版所有行为都能在 GitHub Go 源码中找到答案。</a:t>
+            </a:r>
+          </a:p>
+        </p:txBody>
+      </p:sp>
+      <p:sp>
+        <p:nvSpPr>
+          <p:cNvPr id="30" name="TextBox 29"/>
+          <p:cNvSpPr txBox="1"/>
+          <p:nvPr/>
+        </p:nvSpPr>
+        <p:spPr>
+          <a:xfrm>
+            <a:off x="457200" y="6400800"/>
+            <a:ext cx="11247120" cy="365760"/>
+          </a:xfrm>
+          <a:prstGeom prst="rect">
+            <a:avLst/>
+          </a:prstGeom>
+          <a:noFill/>
+        </p:spPr>
+        <p:txBody>
+          <a:bodyPr wrap="none">
+            <a:spAutoFit/>
+          </a:bodyPr>
+          <a:lstStyle/>
+          <a:p>
+            <a:pPr algn="r">
+              <a:defRPr sz="1000">
+                <a:solidFill>
+                  <a:srgbClr val="999999"/>
+                </a:solidFill>
+              </a:defRPr>
+            </a:pPr>
+            <a:r>
+              <a:t>Reasonix Migration Assistant  |  github.com/CS-Faith/reasonix-migration-assistant</a:t>
+            </a:r>
+          </a:p>
+        </p:txBody>
+      </p:sp>
+    </p:spTree>
+  </p:cSld>
+  <p:clrMapOvr>
+    <a:masterClrMapping/>
+  </p:clrMapOvr>
+</p:sld>
+</file>
+
+<file path=ppt/slides/slide12.xml><?xml version="1.0" encoding="utf-8"?>
+<p:sld xmlns:a="http://schemas.openxmlformats.org/drawingml/2006/main" xmlns:p="http://schemas.openxmlformats.org/presentationml/2006/main" xmlns:r="http://schemas.openxmlformats.org/officeDocument/2006/relationships">
+  <p:cSld>
+    <p:bg>
+      <p:bgPr>
+        <a:solidFill>
+          <a:srgbClr val="0F1423"/>
+        </a:solidFill>
+        <a:effectLst/>
+      </p:bgPr>
+    </p:bg>
+    <p:spTree>
+      <p:nvGrpSpPr>
+        <p:cNvPr id="1" name=""/>
+        <p:cNvGrpSpPr/>
+        <p:nvPr/>
+      </p:nvGrpSpPr>
+      <p:grpSpPr/>
+      <p:sp>
+        <p:nvSpPr>
+          <p:cNvPr id="2" name="TextBox 1"/>
+          <p:cNvSpPr txBox="1"/>
+          <p:nvPr/>
+        </p:nvSpPr>
+        <p:spPr>
+          <a:xfrm>
+            <a:off x="914400" y="1645920"/>
+            <a:ext cx="10332720" cy="3657600"/>
+          </a:xfrm>
+          <a:prstGeom prst="rect">
+            <a:avLst/>
+          </a:prstGeom>
+          <a:noFill/>
+        </p:spPr>
+        <p:txBody>
+          <a:bodyPr wrap="none">
+            <a:spAutoFit/>
+          </a:bodyPr>
+          <a:lstStyle/>
+          <a:p>
+            <a:pPr algn="ctr">
+              <a:defRPr sz="5200" b="1">
+                <a:solidFill>
+                  <a:srgbClr val="FFFFFF"/>
+                </a:solidFill>
+              </a:defRPr>
+            </a:pPr>
+            <a:r>
+              <a:t>谢谢</a:t>
+            </a:r>
+          </a:p>
+          <a:p>
+            <a:pPr algn="ctr">
+              <a:spcBef>
+                <a:spcPts val="1600"/>
+              </a:spcBef>
+              <a:defRPr sz="2400">
+                <a:solidFill>
+                  <a:srgbClr val="4FC3F7"/>
+                </a:solidFill>
+              </a:defRPr>
+            </a:pPr>
+            <a:r>
+              <a:t>你的旧对话，值得在新世界里继续</a:t>
+            </a:r>
+          </a:p>
+          <a:p>
+            <a:pPr algn="ctr">
+              <a:spcBef>
+                <a:spcPts val="4000"/>
+              </a:spcBef>
+              <a:defRPr sz="1800">
+                <a:solidFill>
+                  <a:srgbClr val="88AAFF"/>
+                </a:solidFill>
+              </a:defRPr>
+            </a:pPr>
+            <a:r>
+              <a:t>github.com/CS-Faith/reasonix-migration-assistant</a:t>
+            </a:r>
+          </a:p>
+          <a:p>
+            <a:pPr algn="ctr">
+              <a:spcBef>
+                <a:spcPts val="1000"/>
+              </a:spcBef>
+              <a:defRPr sz="1600">
+                <a:solidFill>
+                  <a:srgbClr val="999999"/>
+                </a:solidFill>
+              </a:defRPr>
+            </a:pPr>
+            <a:r>
+              <a:t>MIT · 欢迎 Star / Fork / PR</a:t>
             </a:r>
           </a:p>
         </p:txBody>
@@ -3200,7 +4677,7 @@
     <p:bg>
       <p:bgPr>
         <a:solidFill>
-          <a:srgbClr val="F5F5FA"/>
+          <a:srgbClr val="F7F8FC"/>
         </a:solidFill>
         <a:effectLst/>
       </p:bgPr>
@@ -3214,14 +4691,66 @@
       <p:grpSpPr/>
       <p:sp>
         <p:nvSpPr>
-          <p:cNvPr id="2" name="TextBox 1"/>
+          <p:cNvPr id="2" name="Rectangle 1"/>
+          <p:cNvSpPr/>
+          <p:nvPr/>
+        </p:nvSpPr>
+        <p:spPr>
+          <a:xfrm>
+            <a:off x="0" y="0"/>
+            <a:ext cx="12188952" cy="1005840"/>
+          </a:xfrm>
+          <a:prstGeom prst="rect">
+            <a:avLst/>
+          </a:prstGeom>
+          <a:solidFill>
+            <a:srgbClr val="1A1A2E"/>
+          </a:solidFill>
+          <a:ln>
+            <a:noFill/>
+          </a:ln>
+        </p:spPr>
+        <p:style>
+          <a:lnRef idx="1">
+            <a:schemeClr val="accent1"/>
+          </a:lnRef>
+          <a:fillRef idx="3">
+            <a:schemeClr val="accent1"/>
+          </a:fillRef>
+          <a:effectRef idx="2">
+            <a:schemeClr val="accent1"/>
+          </a:effectRef>
+          <a:fontRef idx="minor">
+            <a:schemeClr val="lt1"/>
+          </a:fontRef>
+        </p:style>
+        <p:txBody>
+          <a:bodyPr rtlCol="0" anchor="ctr" wrap="square"/>
+          <a:lstStyle/>
+          <a:p>
+            <a:pPr algn="l">
+              <a:defRPr sz="3200" b="1">
+                <a:solidFill>
+                  <a:srgbClr val="FFFFFF"/>
+                </a:solidFill>
+              </a:defRPr>
+            </a:pPr>
+            <a:r>
+              <a:t>  升级困境：数据结构完全变了</a:t>
+            </a:r>
+          </a:p>
+        </p:txBody>
+      </p:sp>
+      <p:sp>
+        <p:nvSpPr>
+          <p:cNvPr id="3" name="TextBox 2"/>
           <p:cNvSpPr txBox="1"/>
           <p:nvPr/>
         </p:nvSpPr>
         <p:spPr>
           <a:xfrm>
-            <a:off x="731520" y="457200"/>
-            <a:ext cx="10698480" cy="1097280"/>
+            <a:off x="731520" y="1371600"/>
+            <a:ext cx="5029200" cy="5029200"/>
           </a:xfrm>
           <a:prstGeom prst="rect">
             <a:avLst/>
@@ -3233,30 +4762,256 @@
             <a:spAutoFit/>
           </a:bodyPr>
           <a:lstStyle/>
-          <a:p>
-            <a:pPr>
-              <a:defRPr sz="3600" b="1">
-                <a:solidFill>
-                  <a:srgbClr val="1A1A2E"/>
-                </a:solidFill>
-              </a:defRPr>
-            </a:pPr>
-            <a:r>
-              <a:t>制作初衷 — 为什么做这个工具？</a:t>
-            </a:r>
-          </a:p>
-        </p:txBody>
-      </p:sp>
-      <p:sp>
-        <p:nvSpPr>
-          <p:cNvPr id="3" name="TextBox 2"/>
+          <a:p/>
+          <a:p>
+            <a:pPr>
+              <a:spcAft>
+                <a:spcPts val="400"/>
+              </a:spcAft>
+            </a:pPr>
+          </a:p>
+          <a:p>
+            <a:pPr>
+              <a:defRPr sz="2200" b="1">
+                <a:solidFill>
+                  <a:srgbClr val="4FC3F7"/>
+                </a:solidFill>
+              </a:defRPr>
+            </a:pPr>
+            <a:r>
+              <a:t>📁  0.53 旧版结构</a:t>
+            </a:r>
+          </a:p>
+          <a:p>
+            <a:pPr>
+              <a:spcAft>
+                <a:spcPts val="200"/>
+              </a:spcAft>
+              <a:defRPr sz="1800">
+                <a:solidFill>
+                  <a:srgbClr val="2D2D3F"/>
+                </a:solidFill>
+              </a:defRPr>
+            </a:pPr>
+            <a:r>
+              <a:t>     desktop-202605270312-1.jsonl      对话内容</a:t>
+            </a:r>
+          </a:p>
+          <a:p>
+            <a:pPr>
+              <a:spcAft>
+                <a:spcPts val="200"/>
+              </a:spcAft>
+              <a:defRPr sz="1800">
+                <a:solidFill>
+                  <a:srgbClr val="2D2D3F"/>
+                </a:solidFill>
+              </a:defRPr>
+            </a:pPr>
+            <a:r>
+              <a:t>     desktop-202605270312-1.meta.json  元数据</a:t>
+            </a:r>
+          </a:p>
+          <a:p>
+            <a:pPr>
+              <a:spcAft>
+                <a:spcPts val="200"/>
+              </a:spcAft>
+              <a:defRPr sz="1800">
+                <a:solidFill>
+                  <a:srgbClr val="2D2D3F"/>
+                </a:solidFill>
+              </a:defRPr>
+            </a:pPr>
+            <a:r>
+              <a:t>     单文件 + 单 meta，简单但孤岛</a:t>
+            </a:r>
+          </a:p>
+          <a:p>
+            <a:pPr>
+              <a:spcAft>
+                <a:spcPts val="400"/>
+              </a:spcAft>
+            </a:pPr>
+          </a:p>
+          <a:p>
+            <a:pPr>
+              <a:defRPr sz="2200" b="1">
+                <a:solidFill>
+                  <a:srgbClr val="4FC3F7"/>
+                </a:solidFill>
+              </a:defRPr>
+            </a:pPr>
+            <a:r>
+              <a:t>📦  1.X 新版结构</a:t>
+            </a:r>
+          </a:p>
+          <a:p>
+            <a:pPr>
+              <a:spcAft>
+                <a:spcPts val="200"/>
+              </a:spcAft>
+              <a:defRPr sz="1800">
+                <a:solidFill>
+                  <a:srgbClr val="2D2D3F"/>
+                </a:solidFill>
+              </a:defRPr>
+            </a:pPr>
+            <a:r>
+              <a:t>     YYYYMMDD-HHMM00.jsonl             对话内容</a:t>
+            </a:r>
+          </a:p>
+          <a:p>
+            <a:pPr>
+              <a:spcAft>
+                <a:spcPts val="200"/>
+              </a:spcAft>
+              <a:defRPr sz="1800">
+                <a:solidFill>
+                  <a:srgbClr val="2D2D3F"/>
+                </a:solidFill>
+              </a:defRPr>
+            </a:pPr>
+            <a:r>
+              <a:t>     YYYYMMDD-HHMM00.jsonl.meta        分支元数据</a:t>
+            </a:r>
+          </a:p>
+          <a:p>
+            <a:pPr>
+              <a:spcAft>
+                <a:spcPts val="200"/>
+              </a:spcAft>
+              <a:defRPr sz="1800">
+                <a:solidFill>
+                  <a:srgbClr val="2D2D3F"/>
+                </a:solidFill>
+              </a:defRPr>
+            </a:pPr>
+            <a:r>
+              <a:t>     YYYYMMDD-HHMM00.telemetry.json    运行指标</a:t>
+            </a:r>
+          </a:p>
+          <a:p>
+            <a:pPr>
+              <a:spcAft>
+                <a:spcPts val="200"/>
+              </a:spcAft>
+              <a:defRPr sz="1800">
+                <a:solidFill>
+                  <a:srgbClr val="2D2D3F"/>
+                </a:solidFill>
+              </a:defRPr>
+            </a:pPr>
+            <a:r>
+              <a:t>     YYYYMMDD-HHMM00.ckpt/            检查点</a:t>
+            </a:r>
+          </a:p>
+          <a:p>
+            <a:pPr>
+              <a:spcAft>
+                <a:spcPts val="200"/>
+              </a:spcAft>
+              <a:defRPr sz="1800">
+                <a:solidFill>
+                  <a:srgbClr val="2D2D3F"/>
+                </a:solidFill>
+              </a:defRPr>
+            </a:pPr>
+            <a:r>
+              <a:t>     四件套，命名规整但互相关联</a:t>
+            </a:r>
+          </a:p>
+          <a:p>
+            <a:pPr>
+              <a:spcAft>
+                <a:spcPts val="400"/>
+              </a:spcAft>
+            </a:pPr>
+          </a:p>
+          <a:p>
+            <a:pPr>
+              <a:defRPr sz="2200" b="1">
+                <a:solidFill>
+                  <a:srgbClr val="4FC3F7"/>
+                </a:solidFill>
+              </a:defRPr>
+            </a:pPr>
+            <a:r>
+              <a:t>❓  直接复制？</a:t>
+            </a:r>
+          </a:p>
+          <a:p>
+            <a:pPr>
+              <a:spcAft>
+                <a:spcPts val="200"/>
+              </a:spcAft>
+              <a:defRPr sz="1800">
+                <a:solidFill>
+                  <a:srgbClr val="2D2D3F"/>
+                </a:solidFill>
+              </a:defRPr>
+            </a:pPr>
+            <a:r>
+              <a:t>     文件名不同 → 不认</a:t>
+            </a:r>
+          </a:p>
+          <a:p>
+            <a:pPr>
+              <a:spcAft>
+                <a:spcPts val="200"/>
+              </a:spcAft>
+              <a:defRPr sz="1800">
+                <a:solidFill>
+                  <a:srgbClr val="2D2D3F"/>
+                </a:solidFill>
+              </a:defRPr>
+            </a:pPr>
+            <a:r>
+              <a:t>     meta 字段名不同（camelCase vs snake_case）→ 不认</a:t>
+            </a:r>
+          </a:p>
+          <a:p>
+            <a:pPr>
+              <a:spcAft>
+                <a:spcPts val="200"/>
+              </a:spcAft>
+              <a:defRPr sz="1800">
+                <a:solidFill>
+                  <a:srgbClr val="2D2D3F"/>
+                </a:solidFill>
+              </a:defRPr>
+            </a:pPr>
+            <a:r>
+              <a:t>     缺少 telemetry / ckpt → 打不开会话</a:t>
+            </a:r>
+          </a:p>
+          <a:p>
+            <a:pPr>
+              <a:spcAft>
+                <a:spcPts val="200"/>
+              </a:spcAft>
+              <a:defRPr sz="1800">
+                <a:solidFill>
+                  <a:srgbClr val="2D2D3F"/>
+                </a:solidFill>
+              </a:defRPr>
+            </a:pPr>
+            <a:r>
+              <a:t>     结论：必须按新版格式重新生成</a:t>
+            </a:r>
+          </a:p>
+        </p:txBody>
+      </p:sp>
+      <p:sp>
+        <p:nvSpPr>
+          <p:cNvPr id="4" name="TextBox 3"/>
           <p:cNvSpPr txBox="1"/>
           <p:nvPr/>
         </p:nvSpPr>
         <p:spPr>
           <a:xfrm>
-            <a:off x="1097280" y="1828800"/>
-            <a:ext cx="9966960" cy="4572000"/>
+            <a:off x="6400800" y="1371600"/>
+            <a:ext cx="5303520" cy="5029200"/>
           </a:xfrm>
           <a:prstGeom prst="rect">
             <a:avLst/>
@@ -3270,176 +5025,193 @@
           <a:lstStyle/>
           <a:p>
             <a:pPr>
-              <a:spcAft>
-                <a:spcPts val="800"/>
-              </a:spcAft>
-              <a:defRPr sz="2200">
-                <a:solidFill>
-                  <a:srgbClr val="333333"/>
-                </a:solidFill>
-              </a:defRPr>
-            </a:pPr>
-            <a:r>
-              <a:t>▎ 痛点</a:t>
-            </a:r>
-          </a:p>
-          <a:p>
-            <a:pPr>
-              <a:spcAft>
-                <a:spcPts val="800"/>
-              </a:spcAft>
-              <a:defRPr sz="2200">
-                <a:solidFill>
-                  <a:srgbClr val="333333"/>
-                </a:solidFill>
-              </a:defRPr>
-            </a:pPr>
-            <a:r>
-              <a:t>  • 升级 Reasonix 后，旧版十几轮、几十轮的聊天记录全部丢失</a:t>
-            </a:r>
-          </a:p>
-          <a:p>
-            <a:pPr>
-              <a:spcAft>
-                <a:spcPts val="800"/>
-              </a:spcAft>
-              <a:defRPr sz="2200">
-                <a:solidFill>
-                  <a:srgbClr val="333333"/>
-                </a:solidFill>
-              </a:defRPr>
-            </a:pPr>
-            <a:r>
-              <a:t>  • 0.53 里积累了上百条对话，每一轮都有调试结果、业务逻辑、灵感碎片</a:t>
-            </a:r>
-          </a:p>
-          <a:p>
-            <a:pPr>
-              <a:spcAft>
-                <a:spcPts val="800"/>
-              </a:spcAft>
-              <a:defRPr sz="2200">
-                <a:solidFill>
-                  <a:srgbClr val="333333"/>
-                </a:solidFill>
-              </a:defRPr>
-            </a:pPr>
-            <a:r>
-              <a:t>  • MCP 插件配置要手动重配，费时费力</a:t>
-            </a:r>
-          </a:p>
-          <a:p>
-            <a:pPr>
-              <a:spcAft>
-                <a:spcPts val="800"/>
-              </a:spcAft>
-              <a:defRPr sz="2200">
-                <a:solidFill>
-                  <a:srgbClr val="333333"/>
-                </a:solidFill>
-              </a:defRPr>
-            </a:pPr>
-          </a:p>
-          <a:p>
-            <a:pPr>
-              <a:spcAft>
-                <a:spcPts val="800"/>
-              </a:spcAft>
-              <a:defRPr sz="2200">
-                <a:solidFill>
-                  <a:srgbClr val="333333"/>
-                </a:solidFill>
-              </a:defRPr>
-            </a:pPr>
-            <a:r>
-              <a:t>▎ 场景</a:t>
-            </a:r>
-          </a:p>
-          <a:p>
-            <a:pPr>
-              <a:spcAft>
-                <a:spcPts val="800"/>
-              </a:spcAft>
-              <a:defRPr sz="2200">
-                <a:solidFill>
-                  <a:srgbClr val="333333"/>
-                </a:solidFill>
-              </a:defRPr>
-            </a:pPr>
-            <a:r>
-              <a:t>  • 场景 A：公司电脑装的新版，C 盘有 0.53 老数据，聊天记录全无</a:t>
-            </a:r>
-          </a:p>
-          <a:p>
-            <a:pPr>
-              <a:spcAft>
-                <a:spcPts val="800"/>
-              </a:spcAft>
-              <a:defRPr sz="2200">
-                <a:solidFill>
-                  <a:srgbClr val="333333"/>
-                </a:solidFill>
-              </a:defRPr>
-            </a:pPr>
-            <a:r>
-              <a:t>  • 场景 B：U 盘便携版插到新电脑，历史对话一片空白</a:t>
-            </a:r>
-          </a:p>
-          <a:p>
-            <a:pPr>
-              <a:spcAft>
-                <a:spcPts val="800"/>
-              </a:spcAft>
-              <a:defRPr sz="2200">
-                <a:solidFill>
-                  <a:srgbClr val="333333"/>
-                </a:solidFill>
-              </a:defRPr>
-            </a:pPr>
-          </a:p>
-          <a:p>
-            <a:pPr>
-              <a:spcAft>
-                <a:spcPts val="800"/>
-              </a:spcAft>
-              <a:defRPr sz="2200">
-                <a:solidFill>
-                  <a:srgbClr val="333333"/>
-                </a:solidFill>
-              </a:defRPr>
-            </a:pPr>
-            <a:r>
-              <a:t>▎ 决定</a:t>
-            </a:r>
-          </a:p>
-          <a:p>
-            <a:pPr>
-              <a:spcAft>
-                <a:spcPts val="800"/>
-              </a:spcAft>
-              <a:defRPr sz="2200">
-                <a:solidFill>
-                  <a:srgbClr val="333333"/>
-                </a:solidFill>
-              </a:defRPr>
-            </a:pPr>
-            <a:r>
-              <a:t>  • 读源码、反推数据结构、写自动化脚本</a:t>
-            </a:r>
-          </a:p>
-          <a:p>
-            <a:pPr>
-              <a:spcAft>
-                <a:spcPts val="800"/>
-              </a:spcAft>
-              <a:defRPr sz="2200">
-                <a:solidFill>
-                  <a:srgbClr val="333333"/>
-                </a:solidFill>
-              </a:defRPr>
-            </a:pPr>
-            <a:r>
-              <a:t>  • 做一款工具：零配置、双击运行、数秒完成</a:t>
+              <a:defRPr sz="2400" b="1">
+                <a:solidFill>
+                  <a:srgbClr val="7C4DFF"/>
+                </a:solidFill>
+              </a:defRPr>
+            </a:pPr>
+            <a:r>
+              <a:t>唯一办法：读 GitHub 源码</a:t>
+            </a:r>
+          </a:p>
+          <a:p>
+            <a:pPr>
+              <a:spcAft>
+                <a:spcPts val="200"/>
+              </a:spcAft>
+              <a:defRPr sz="1600">
+                <a:solidFill>
+                  <a:srgbClr val="2D2D3F"/>
+                </a:solidFill>
+              </a:defRPr>
+            </a:pPr>
+            <a:r>
+              <a:t>从 0.53 到 1.x，数据目录结构完全不同。</a:t>
+            </a:r>
+          </a:p>
+          <a:p>
+            <a:pPr>
+              <a:spcAft>
+                <a:spcPts val="200"/>
+              </a:spcAft>
+              <a:defRPr sz="1600">
+                <a:solidFill>
+                  <a:srgbClr val="2D2D3F"/>
+                </a:solidFill>
+              </a:defRPr>
+            </a:pPr>
+            <a:r>
+              <a:t>老版命名 desktop-YYYYMMDDHHMM-N.jsonl，新版是</a:t>
+            </a:r>
+          </a:p>
+          <a:p>
+            <a:pPr>
+              <a:spcAft>
+                <a:spcPts val="200"/>
+              </a:spcAft>
+              <a:defRPr sz="1600">
+                <a:solidFill>
+                  <a:srgbClr val="2D2D3F"/>
+                </a:solidFill>
+              </a:defRPr>
+            </a:pPr>
+            <a:r>
+              <a:t>YYYYMMDD-HHMM00.000000000-deepseek-v4-flash。</a:t>
+            </a:r>
+          </a:p>
+          <a:p>
+            <a:pPr>
+              <a:spcAft>
+                <a:spcPts val="200"/>
+              </a:spcAft>
+              <a:defRPr sz="1600">
+                <a:solidFill>
+                  <a:srgbClr val="2D2D3F"/>
+                </a:solidFill>
+              </a:defRPr>
+            </a:pPr>
+          </a:p>
+          <a:p>
+            <a:pPr>
+              <a:spcAft>
+                <a:spcPts val="200"/>
+              </a:spcAft>
+              <a:defRPr sz="1600">
+                <a:solidFill>
+                  <a:srgbClr val="2D2D3F"/>
+                </a:solidFill>
+              </a:defRPr>
+            </a:pPr>
+            <a:r>
+              <a:t>直接复制过去，新版完全不认——文件名不匹配、</a:t>
+            </a:r>
+          </a:p>
+          <a:p>
+            <a:pPr>
+              <a:spcAft>
+                <a:spcPts val="200"/>
+              </a:spcAft>
+              <a:defRPr sz="1600">
+                <a:solidFill>
+                  <a:srgbClr val="2D2D3F"/>
+                </a:solidFill>
+              </a:defRPr>
+            </a:pPr>
+            <a:r>
+              <a:t>meta 字段名不匹配、缺少 telemetry 和 ckpt。</a:t>
+            </a:r>
+          </a:p>
+          <a:p>
+            <a:pPr>
+              <a:spcAft>
+                <a:spcPts val="200"/>
+              </a:spcAft>
+              <a:defRPr sz="1600">
+                <a:solidFill>
+                  <a:srgbClr val="2D2D3F"/>
+                </a:solidFill>
+              </a:defRPr>
+            </a:pPr>
+          </a:p>
+          <a:p>
+            <a:pPr>
+              <a:spcAft>
+                <a:spcPts val="200"/>
+              </a:spcAft>
+              <a:defRPr sz="1600">
+                <a:solidFill>
+                  <a:srgbClr val="2D2D3F"/>
+                </a:solidFill>
+              </a:defRPr>
+            </a:pPr>
+            <a:r>
+              <a:t>没有文档。没有迁移指南。没有现成工具。</a:t>
+            </a:r>
+          </a:p>
+          <a:p>
+            <a:pPr>
+              <a:spcAft>
+                <a:spcPts val="200"/>
+              </a:spcAft>
+              <a:defRPr sz="1600">
+                <a:solidFill>
+                  <a:srgbClr val="2D2D3F"/>
+                </a:solidFill>
+              </a:defRPr>
+            </a:pPr>
+            <a:r>
+              <a:t>唯一的办法：clone GitHub 仓库，打开 Go 源码，</a:t>
+            </a:r>
+          </a:p>
+          <a:p>
+            <a:pPr>
+              <a:spcAft>
+                <a:spcPts val="200"/>
+              </a:spcAft>
+              <a:defRPr sz="1600">
+                <a:solidFill>
+                  <a:srgbClr val="2D2D3F"/>
+                </a:solidFill>
+              </a:defRPr>
+            </a:pPr>
+            <a:r>
+              <a:t>从 struct tag 里读字段名，从函数签名里推逻辑。</a:t>
+            </a:r>
+          </a:p>
+        </p:txBody>
+      </p:sp>
+      <p:sp>
+        <p:nvSpPr>
+          <p:cNvPr id="5" name="TextBox 4"/>
+          <p:cNvSpPr txBox="1"/>
+          <p:nvPr/>
+        </p:nvSpPr>
+        <p:spPr>
+          <a:xfrm>
+            <a:off x="457200" y="6400800"/>
+            <a:ext cx="11247120" cy="365760"/>
+          </a:xfrm>
+          <a:prstGeom prst="rect">
+            <a:avLst/>
+          </a:prstGeom>
+          <a:noFill/>
+        </p:spPr>
+        <p:txBody>
+          <a:bodyPr wrap="none">
+            <a:spAutoFit/>
+          </a:bodyPr>
+          <a:lstStyle/>
+          <a:p>
+            <a:pPr algn="r">
+              <a:defRPr sz="1000">
+                <a:solidFill>
+                  <a:srgbClr val="999999"/>
+                </a:solidFill>
+              </a:defRPr>
+            </a:pPr>
+            <a:r>
+              <a:t>Reasonix Migration Assistant  |  github.com/CS-Faith/reasonix-migration-assistant</a:t>
             </a:r>
           </a:p>
         </p:txBody>
@@ -3458,7 +5230,7 @@
     <p:bg>
       <p:bgPr>
         <a:solidFill>
-          <a:srgbClr val="F5F5FA"/>
+          <a:srgbClr val="F7F8FC"/>
         </a:solidFill>
         <a:effectLst/>
       </p:bgPr>
@@ -3472,14 +5244,66 @@
       <p:grpSpPr/>
       <p:sp>
         <p:nvSpPr>
-          <p:cNvPr id="2" name="TextBox 1"/>
+          <p:cNvPr id="2" name="Rectangle 1"/>
+          <p:cNvSpPr/>
+          <p:nvPr/>
+        </p:nvSpPr>
+        <p:spPr>
+          <a:xfrm>
+            <a:off x="0" y="0"/>
+            <a:ext cx="12188952" cy="1005840"/>
+          </a:xfrm>
+          <a:prstGeom prst="rect">
+            <a:avLst/>
+          </a:prstGeom>
+          <a:solidFill>
+            <a:srgbClr val="1A1A2E"/>
+          </a:solidFill>
+          <a:ln>
+            <a:noFill/>
+          </a:ln>
+        </p:spPr>
+        <p:style>
+          <a:lnRef idx="1">
+            <a:schemeClr val="accent1"/>
+          </a:lnRef>
+          <a:fillRef idx="3">
+            <a:schemeClr val="accent1"/>
+          </a:fillRef>
+          <a:effectRef idx="2">
+            <a:schemeClr val="accent1"/>
+          </a:effectRef>
+          <a:fontRef idx="minor">
+            <a:schemeClr val="lt1"/>
+          </a:fontRef>
+        </p:style>
+        <p:txBody>
+          <a:bodyPr rtlCol="0" anchor="ctr" wrap="square"/>
+          <a:lstStyle/>
+          <a:p>
+            <a:pPr algn="l">
+              <a:defRPr sz="3200" b="1">
+                <a:solidFill>
+                  <a:srgbClr val="FFFFFF"/>
+                </a:solidFill>
+              </a:defRPr>
+            </a:pPr>
+            <a:r>
+              <a:t>  技术细节 ①：反推 BranchMeta</a:t>
+            </a:r>
+          </a:p>
+        </p:txBody>
+      </p:sp>
+      <p:sp>
+        <p:nvSpPr>
+          <p:cNvPr id="3" name="TextBox 2"/>
           <p:cNvSpPr txBox="1"/>
           <p:nvPr/>
         </p:nvSpPr>
         <p:spPr>
           <a:xfrm>
-            <a:off x="731520" y="457200"/>
-            <a:ext cx="10698480" cy="1097280"/>
+            <a:off x="731520" y="1280160"/>
+            <a:ext cx="5486400" cy="5303520"/>
           </a:xfrm>
           <a:prstGeom prst="rect">
             <a:avLst/>
@@ -3493,28 +5317,116 @@
           <a:lstStyle/>
           <a:p>
             <a:pPr>
-              <a:defRPr sz="3600" b="1">
-                <a:solidFill>
-                  <a:srgbClr val="1A1A2E"/>
-                </a:solidFill>
-              </a:defRPr>
-            </a:pPr>
-            <a:r>
-              <a:t>目标 — 迁移什么？</a:t>
-            </a:r>
-          </a:p>
-        </p:txBody>
-      </p:sp>
-      <p:sp>
-        <p:nvSpPr>
-          <p:cNvPr id="3" name="TextBox 2"/>
+              <a:defRPr sz="2200" b="1">
+                <a:solidFill>
+                  <a:srgbClr val="7C4DFF"/>
+                </a:solidFill>
+              </a:defRPr>
+            </a:pPr>
+            <a:r>
+              <a:t>Go 源码 — branch.go</a:t>
+            </a:r>
+          </a:p>
+        </p:txBody>
+      </p:sp>
+      <p:sp>
+        <p:nvSpPr>
+          <p:cNvPr id="4" name="Rectangle 3"/>
+          <p:cNvSpPr/>
+          <p:nvPr/>
+        </p:nvSpPr>
+        <p:spPr>
+          <a:xfrm>
+            <a:off x="731520" y="1828800"/>
+            <a:ext cx="5486400" cy="2926080"/>
+          </a:xfrm>
+          <a:prstGeom prst="rect">
+            <a:avLst/>
+          </a:prstGeom>
+          <a:solidFill>
+            <a:srgbClr val="1E2A3A"/>
+          </a:solidFill>
+          <a:ln>
+            <a:noFill/>
+          </a:ln>
+        </p:spPr>
+        <p:style>
+          <a:lnRef idx="1">
+            <a:schemeClr val="accent1"/>
+          </a:lnRef>
+          <a:fillRef idx="3">
+            <a:schemeClr val="accent1"/>
+          </a:fillRef>
+          <a:effectRef idx="2">
+            <a:schemeClr val="accent1"/>
+          </a:effectRef>
+          <a:fontRef idx="minor">
+            <a:schemeClr val="lt1"/>
+          </a:fontRef>
+        </p:style>
+        <p:txBody>
+          <a:bodyPr rtlCol="0" anchor="ctr" wrap="square"/>
+          <a:lstStyle/>
+          <a:p>
+            <a:pPr algn="ctr">
+              <a:spcAft>
+                <a:spcPts val="0"/>
+              </a:spcAft>
+              <a:defRPr sz="1300">
+                <a:solidFill>
+                  <a:srgbClr val="A5D6FF"/>
+                </a:solidFill>
+                <a:latin typeface="Consolas"/>
+              </a:defRPr>
+            </a:pPr>
+            <a:r>
+              <a:t>type BranchMeta struct {</a:t>
+            </a:r>
+            <a:br/>
+            <a:r>
+              <a:t>    ID            string    `json:"id"`</a:t>
+            </a:r>
+            <a:br/>
+            <a:r>
+              <a:t>    CreatedAt     time.Time `json:"created_at"`</a:t>
+            </a:r>
+            <a:br/>
+            <a:r>
+              <a:t>    UpdatedAt     time.Time `json:"updated_at"`</a:t>
+            </a:r>
+            <a:br/>
+            <a:r>
+              <a:t>    Scope         string    `json:"scope,omitempty"`</a:t>
+            </a:r>
+            <a:br/>
+            <a:r>
+              <a:t>    WorkspaceRoot string    `json:"workspace_root,omitempty"`</a:t>
+            </a:r>
+            <a:br/>
+            <a:r>
+              <a:t>    TopicID       string    `json:"topic_id,omitempty"`</a:t>
+            </a:r>
+            <a:br/>
+            <a:r>
+              <a:t>    TopicTitle    string    `json:"topic_title,omitempty"`</a:t>
+            </a:r>
+            <a:br/>
+            <a:r>
+              <a:t>}</a:t>
+            </a:r>
+          </a:p>
+        </p:txBody>
+      </p:sp>
+      <p:sp>
+        <p:nvSpPr>
+          <p:cNvPr id="5" name="TextBox 4"/>
           <p:cNvSpPr txBox="1"/>
           <p:nvPr/>
         </p:nvSpPr>
         <p:spPr>
           <a:xfrm>
-            <a:off x="1097280" y="1828800"/>
-            <a:ext cx="9966960" cy="4572000"/>
+            <a:off x="6858000" y="1280160"/>
+            <a:ext cx="4846320" cy="5303520"/>
           </a:xfrm>
           <a:prstGeom prst="rect">
             <a:avLst/>
@@ -3529,199 +5441,174 @@
           <a:p>
             <a:pPr>
               <a:spcAft>
-                <a:spcPts val="800"/>
-              </a:spcAft>
-              <a:defRPr sz="2200">
-                <a:solidFill>
-                  <a:srgbClr val="333333"/>
-                </a:solidFill>
-              </a:defRPr>
-            </a:pPr>
-            <a:r>
-              <a:t>▎ 对话记录</a:t>
-            </a:r>
-          </a:p>
-          <a:p>
-            <a:pPr>
-              <a:spcAft>
-                <a:spcPts val="800"/>
-              </a:spcAft>
-              <a:defRPr sz="2200">
-                <a:solidFill>
-                  <a:srgbClr val="333333"/>
-                </a:solidFill>
-              </a:defRPr>
-            </a:pPr>
-            <a:r>
-              <a:t>  • 完整迁移到新版历史对话列表，可随时打开继续交流</a:t>
-            </a:r>
-          </a:p>
-          <a:p>
-            <a:pPr>
-              <a:spcAft>
-                <a:spcPts val="800"/>
-              </a:spcAft>
-              <a:defRPr sz="2200">
-                <a:solidFill>
-                  <a:srgbClr val="333333"/>
-                </a:solidFill>
-              </a:defRPr>
-            </a:pPr>
-          </a:p>
-          <a:p>
-            <a:pPr>
-              <a:spcAft>
-                <a:spcPts val="800"/>
-              </a:spcAft>
-              <a:defRPr sz="2200">
-                <a:solidFill>
-                  <a:srgbClr val="333333"/>
-                </a:solidFill>
-              </a:defRPr>
-            </a:pPr>
-            <a:r>
-              <a:t>▎ MCP 插件配置</a:t>
-            </a:r>
-          </a:p>
-          <a:p>
-            <a:pPr>
-              <a:spcAft>
-                <a:spcPts val="800"/>
-              </a:spcAft>
-              <a:defRPr sz="2200">
-                <a:solidFill>
-                  <a:srgbClr val="333333"/>
-                </a:solidFill>
-              </a:defRPr>
-            </a:pPr>
-            <a:r>
-              <a:t>  • JSON → TOML 自动转换，无需手动重配</a:t>
-            </a:r>
-          </a:p>
-          <a:p>
-            <a:pPr>
-              <a:spcAft>
-                <a:spcPts val="800"/>
-              </a:spcAft>
-              <a:defRPr sz="2200">
-                <a:solidFill>
-                  <a:srgbClr val="333333"/>
-                </a:solidFill>
-              </a:defRPr>
-            </a:pPr>
-          </a:p>
-          <a:p>
-            <a:pPr>
-              <a:spcAft>
-                <a:spcPts val="800"/>
-              </a:spcAft>
-              <a:defRPr sz="2200">
-                <a:solidFill>
-                  <a:srgbClr val="333333"/>
-                </a:solidFill>
-              </a:defRPr>
-            </a:pPr>
-            <a:r>
-              <a:t>▎ 记忆文档</a:t>
-            </a:r>
-          </a:p>
-          <a:p>
-            <a:pPr>
-              <a:spcAft>
-                <a:spcPts val="800"/>
-              </a:spcAft>
-              <a:defRPr sz="2200">
-                <a:solidFill>
-                  <a:srgbClr val="333333"/>
-                </a:solidFill>
-              </a:defRPr>
-            </a:pPr>
-            <a:r>
-              <a:t>  • 全局记忆 + 项目记忆，一个不少</a:t>
-            </a:r>
-          </a:p>
-          <a:p>
-            <a:pPr>
-              <a:spcAft>
-                <a:spcPts val="800"/>
-              </a:spcAft>
-              <a:defRPr sz="2200">
-                <a:solidFill>
-                  <a:srgbClr val="333333"/>
-                </a:solidFill>
-              </a:defRPr>
-            </a:pPr>
-          </a:p>
-          <a:p>
-            <a:pPr>
-              <a:spcAft>
-                <a:spcPts val="800"/>
-              </a:spcAft>
-              <a:defRPr sz="2200">
-                <a:solidFill>
-                  <a:srgbClr val="333333"/>
-                </a:solidFill>
-              </a:defRPr>
-            </a:pPr>
-            <a:r>
-              <a:t>▎ 运行指标</a:t>
-            </a:r>
-          </a:p>
-          <a:p>
-            <a:pPr>
-              <a:spcAft>
-                <a:spcPts val="800"/>
-              </a:spcAft>
-              <a:defRPr sz="2200">
-                <a:solidFill>
-                  <a:srgbClr val="333333"/>
-                </a:solidFill>
-              </a:defRPr>
-            </a:pPr>
-            <a:r>
-              <a:t>  • Token 用量、缓存命中率、费用、依赖文件列表，统统带着走</a:t>
-            </a:r>
-          </a:p>
-          <a:p>
-            <a:pPr>
-              <a:spcAft>
-                <a:spcPts val="800"/>
-              </a:spcAft>
-              <a:defRPr sz="2200">
-                <a:solidFill>
-                  <a:srgbClr val="333333"/>
-                </a:solidFill>
-              </a:defRPr>
-            </a:pPr>
-          </a:p>
-          <a:p>
-            <a:pPr>
-              <a:spcAft>
-                <a:spcPts val="800"/>
-              </a:spcAft>
-              <a:defRPr sz="2200">
-                <a:solidFill>
-                  <a:srgbClr val="333333"/>
-                </a:solidFill>
-              </a:defRPr>
-            </a:pPr>
-            <a:r>
-              <a:t>▎ Skill</a:t>
-            </a:r>
-          </a:p>
-          <a:p>
-            <a:pPr>
-              <a:spcAft>
-                <a:spcPts val="800"/>
-              </a:spcAft>
-              <a:defRPr sz="2200">
-                <a:solidFill>
-                  <a:srgbClr val="333333"/>
-                </a:solidFill>
-              </a:defRPr>
-            </a:pPr>
-            <a:r>
-              <a:t>  • 新版原生支持，无需额外操作</a:t>
+                <a:spcPts val="200"/>
+              </a:spcAft>
+              <a:defRPr sz="1800" b="1">
+                <a:solidFill>
+                  <a:srgbClr val="7C4DFF"/>
+                </a:solidFill>
+              </a:defRPr>
+            </a:pPr>
+            <a:r>
+              <a:t>三 个 关 键 教 训</a:t>
+            </a:r>
+          </a:p>
+          <a:p/>
+          <a:p>
+            <a:pPr>
+              <a:spcAft>
+                <a:spcPts val="200"/>
+              </a:spcAft>
+              <a:defRPr sz="1800" b="1">
+                <a:solidFill>
+                  <a:srgbClr val="FF7050"/>
+                </a:solidFill>
+              </a:defRPr>
+            </a:pPr>
+            <a:r>
+              <a:t>1  snake_case，不是 camelCase</a:t>
+            </a:r>
+          </a:p>
+          <a:p>
+            <a:pPr>
+              <a:spcAft>
+                <a:spcPts val="200"/>
+              </a:spcAft>
+              <a:defRPr sz="1800" b="0">
+                <a:solidFill>
+                  <a:srgbClr val="2D2D3F"/>
+                </a:solidFill>
+              </a:defRPr>
+            </a:pPr>
+            <a:r>
+              <a:t>   最初写成 "topicId"、"workspaceRoot"——新版不理。</a:t>
+            </a:r>
+          </a:p>
+          <a:p>
+            <a:pPr>
+              <a:spcAft>
+                <a:spcPts val="200"/>
+              </a:spcAft>
+              <a:defRPr sz="1800" b="0">
+                <a:solidFill>
+                  <a:srgbClr val="2D2D3F"/>
+                </a:solidFill>
+              </a:defRPr>
+            </a:pPr>
+            <a:r>
+              <a:t>   必须从 struct tag `json:"..."` 里读字段名，不能猜。</a:t>
+            </a:r>
+          </a:p>
+          <a:p/>
+          <a:p>
+            <a:pPr>
+              <a:spcAft>
+                <a:spcPts val="200"/>
+              </a:spcAft>
+              <a:defRPr sz="1800" b="1">
+                <a:solidFill>
+                  <a:srgbClr val="FF7050"/>
+                </a:solidFill>
+              </a:defRPr>
+            </a:pPr>
+            <a:r>
+              <a:t>2  RFC3339 时间格式</a:t>
+            </a:r>
+          </a:p>
+          <a:p>
+            <a:pPr>
+              <a:spcAft>
+                <a:spcPts val="200"/>
+              </a:spcAft>
+              <a:defRPr sz="1800" b="0">
+                <a:solidFill>
+                  <a:srgbClr val="2D2D3F"/>
+                </a:solidFill>
+              </a:defRPr>
+            </a:pPr>
+            <a:r>
+              <a:t>   "2026-06-04T07:41:03Z" — 精确到秒即可。</a:t>
+            </a:r>
+          </a:p>
+          <a:p/>
+          <a:p>
+            <a:pPr>
+              <a:spcAft>
+                <a:spcPts val="200"/>
+              </a:spcAft>
+              <a:defRPr sz="1800" b="1">
+                <a:solidFill>
+                  <a:srgbClr val="FF7050"/>
+                </a:solidFill>
+              </a:defRPr>
+            </a:pPr>
+            <a:r>
+              <a:t>3  omitempty = 可省略，但要不要省略是策略问题</a:t>
+            </a:r>
+          </a:p>
+          <a:p>
+            <a:pPr>
+              <a:spcAft>
+                <a:spcPts val="200"/>
+              </a:spcAft>
+              <a:defRPr sz="1800" b="0">
+                <a:solidFill>
+                  <a:srgbClr val="2D2D3F"/>
+                </a:solidFill>
+              </a:defRPr>
+            </a:pPr>
+            <a:r>
+              <a:t>   留空 topic_id → 新版自动分配（会污染侧边栏）</a:t>
+            </a:r>
+          </a:p>
+          <a:p>
+            <a:pPr>
+              <a:spcAft>
+                <a:spcPts val="200"/>
+              </a:spcAft>
+              <a:defRPr sz="1800" b="0">
+                <a:solidFill>
+                  <a:srgbClr val="2D2D3F"/>
+                </a:solidFill>
+              </a:defRPr>
+            </a:pPr>
+            <a:r>
+              <a:t>   预填 topic_id → 侧边栏干净，但需额外处理标题</a:t>
+            </a:r>
+          </a:p>
+        </p:txBody>
+      </p:sp>
+      <p:sp>
+        <p:nvSpPr>
+          <p:cNvPr id="6" name="TextBox 5"/>
+          <p:cNvSpPr txBox="1"/>
+          <p:nvPr/>
+        </p:nvSpPr>
+        <p:spPr>
+          <a:xfrm>
+            <a:off x="457200" y="6400800"/>
+            <a:ext cx="11247120" cy="365760"/>
+          </a:xfrm>
+          <a:prstGeom prst="rect">
+            <a:avLst/>
+          </a:prstGeom>
+          <a:noFill/>
+        </p:spPr>
+        <p:txBody>
+          <a:bodyPr wrap="none">
+            <a:spAutoFit/>
+          </a:bodyPr>
+          <a:lstStyle/>
+          <a:p>
+            <a:pPr algn="r">
+              <a:defRPr sz="1000">
+                <a:solidFill>
+                  <a:srgbClr val="999999"/>
+                </a:solidFill>
+              </a:defRPr>
+            </a:pPr>
+            <a:r>
+              <a:t>Reasonix Migration Assistant  |  github.com/CS-Faith/reasonix-migration-assistant</a:t>
             </a:r>
           </a:p>
         </p:txBody>
@@ -3740,7 +5627,7 @@
     <p:bg>
       <p:bgPr>
         <a:solidFill>
-          <a:srgbClr val="F0F5F0"/>
+          <a:srgbClr val="F7F8FC"/>
         </a:solidFill>
         <a:effectLst/>
       </p:bgPr>
@@ -3754,14 +5641,66 @@
       <p:grpSpPr/>
       <p:sp>
         <p:nvSpPr>
-          <p:cNvPr id="2" name="TextBox 1"/>
+          <p:cNvPr id="2" name="Rectangle 1"/>
+          <p:cNvSpPr/>
+          <p:nvPr/>
+        </p:nvSpPr>
+        <p:spPr>
+          <a:xfrm>
+            <a:off x="0" y="0"/>
+            <a:ext cx="12188952" cy="1005840"/>
+          </a:xfrm>
+          <a:prstGeom prst="rect">
+            <a:avLst/>
+          </a:prstGeom>
+          <a:solidFill>
+            <a:srgbClr val="1A1A2E"/>
+          </a:solidFill>
+          <a:ln>
+            <a:noFill/>
+          </a:ln>
+        </p:spPr>
+        <p:style>
+          <a:lnRef idx="1">
+            <a:schemeClr val="accent1"/>
+          </a:lnRef>
+          <a:fillRef idx="3">
+            <a:schemeClr val="accent1"/>
+          </a:fillRef>
+          <a:effectRef idx="2">
+            <a:schemeClr val="accent1"/>
+          </a:effectRef>
+          <a:fontRef idx="minor">
+            <a:schemeClr val="lt1"/>
+          </a:fontRef>
+        </p:style>
+        <p:txBody>
+          <a:bodyPr rtlCol="0" anchor="ctr" wrap="square"/>
+          <a:lstStyle/>
+          <a:p>
+            <a:pPr algn="l">
+              <a:defRPr sz="3200" b="1">
+                <a:solidFill>
+                  <a:srgbClr val="FFFFFF"/>
+                </a:solidFill>
+              </a:defRPr>
+            </a:pPr>
+            <a:r>
+              <a:t>  技术细节 ②：反推 telemetry + readFiles + ckpt</a:t>
+            </a:r>
+          </a:p>
+        </p:txBody>
+      </p:sp>
+      <p:sp>
+        <p:nvSpPr>
+          <p:cNvPr id="3" name="TextBox 2"/>
           <p:cNvSpPr txBox="1"/>
           <p:nvPr/>
         </p:nvSpPr>
         <p:spPr>
           <a:xfrm>
-            <a:off x="731520" y="457200"/>
-            <a:ext cx="10698480" cy="1097280"/>
+            <a:off x="457200" y="1280160"/>
+            <a:ext cx="11247120" cy="5303520"/>
           </a:xfrm>
           <a:prstGeom prst="rect">
             <a:avLst/>
@@ -3773,30 +5712,260 @@
             <a:spAutoFit/>
           </a:bodyPr>
           <a:lstStyle/>
-          <a:p>
-            <a:pPr>
-              <a:defRPr sz="3600" b="1">
-                <a:solidFill>
-                  <a:srgbClr val="1A1A2E"/>
-                </a:solidFill>
-              </a:defRPr>
-            </a:pPr>
-            <a:r>
-              <a:t>技术实现 — 整体架构</a:t>
-            </a:r>
-          </a:p>
-        </p:txBody>
-      </p:sp>
-      <p:sp>
-        <p:nvSpPr>
-          <p:cNvPr id="3" name="TextBox 2"/>
+          <a:p/>
+          <a:p>
+            <a:pPr>
+              <a:spcAft>
+                <a:spcPts val="400"/>
+              </a:spcAft>
+            </a:pPr>
+          </a:p>
+          <a:p>
+            <a:pPr>
+              <a:defRPr sz="2200" b="1">
+                <a:solidFill>
+                  <a:srgbClr val="4FC3F7"/>
+                </a:solidFill>
+              </a:defRPr>
+            </a:pPr>
+            <a:r>
+              <a:t>📊  telemetry.json — 老字段 → 新字段</a:t>
+            </a:r>
+          </a:p>
+          <a:p>
+            <a:pPr>
+              <a:spcAft>
+                <a:spcPts val="200"/>
+              </a:spcAft>
+              <a:defRPr sz="1800">
+                <a:solidFill>
+                  <a:srgbClr val="2D2D3F"/>
+                </a:solidFill>
+              </a:defRPr>
+            </a:pPr>
+            <a:r>
+              <a:t>     lastPromptTokens  →  promptTokens               最后一次请求 prompt token</a:t>
+            </a:r>
+          </a:p>
+          <a:p>
+            <a:pPr>
+              <a:spcAft>
+                <a:spcPts val="200"/>
+              </a:spcAft>
+              <a:defRPr sz="1800">
+                <a:solidFill>
+                  <a:srgbClr val="2D2D3F"/>
+                </a:solidFill>
+              </a:defRPr>
+            </a:pPr>
+            <a:r>
+              <a:t>     totalCompletionTokens  →  completionTokens       总输出 token</a:t>
+            </a:r>
+          </a:p>
+          <a:p>
+            <a:pPr>
+              <a:spcAft>
+                <a:spcPts val="200"/>
+              </a:spcAft>
+              <a:defRPr sz="1800">
+                <a:solidFill>
+                  <a:srgbClr val="2D2D3F"/>
+                </a:solidFill>
+              </a:defRPr>
+            </a:pPr>
+            <a:r>
+              <a:t>     cacheHitTokens / cacheMissTokens  →  同名字段    缓存命中 / 未命中</a:t>
+            </a:r>
+          </a:p>
+          <a:p>
+            <a:pPr>
+              <a:spcAft>
+                <a:spcPts val="200"/>
+              </a:spcAft>
+              <a:defRPr sz="1800">
+                <a:solidFill>
+                  <a:srgbClr val="2D2D3F"/>
+                </a:solidFill>
+              </a:defRPr>
+            </a:pPr>
+            <a:r>
+              <a:t>     totalCostUsd  →  sessionCost / sessionCostUsd    费用</a:t>
+            </a:r>
+          </a:p>
+          <a:p>
+            <a:pPr>
+              <a:spcAft>
+                <a:spcPts val="400"/>
+              </a:spcAft>
+            </a:pPr>
+          </a:p>
+          <a:p>
+            <a:pPr>
+              <a:defRPr sz="2200" b="1">
+                <a:solidFill>
+                  <a:srgbClr val="4FC3F7"/>
+                </a:solidFill>
+              </a:defRPr>
+            </a:pPr>
+            <a:r>
+              <a:t>⚠  魔鬼细节：requestCount 必须 ≥ 1</a:t>
+            </a:r>
+          </a:p>
+          <a:p>
+            <a:pPr>
+              <a:spcAft>
+                <a:spcPts val="200"/>
+              </a:spcAft>
+              <a:defRPr sz="1800">
+                <a:solidFill>
+                  <a:srgbClr val="2D2D3F"/>
+                </a:solidFill>
+              </a:defRPr>
+            </a:pPr>
+            <a:r>
+              <a:t>     loadTelemetry() 源码判断：if snapshot.Usage.RequestCount &gt; 0 { 加载 }</a:t>
+            </a:r>
+          </a:p>
+          <a:p>
+            <a:pPr>
+              <a:spcAft>
+                <a:spcPts val="200"/>
+              </a:spcAft>
+              <a:defRPr sz="1800">
+                <a:solidFill>
+                  <a:srgbClr val="2D2D3F"/>
+                </a:solidFill>
+              </a:defRPr>
+            </a:pPr>
+            <a:r>
+              <a:t>     注意是 &gt; 不是 &gt;=。写 0 → 全部指标不显示。填 1 → 正常。</a:t>
+            </a:r>
+          </a:p>
+          <a:p>
+            <a:pPr>
+              <a:spcAft>
+                <a:spcPts val="200"/>
+              </a:spcAft>
+              <a:defRPr sz="1800">
+                <a:solidFill>
+                  <a:srgbClr val="2D2D3F"/>
+                </a:solidFill>
+              </a:defRPr>
+            </a:pPr>
+            <a:r>
+              <a:t>     不看源码，这个 bug 永远找不到。</a:t>
+            </a:r>
+          </a:p>
+          <a:p>
+            <a:pPr>
+              <a:spcAft>
+                <a:spcPts val="400"/>
+              </a:spcAft>
+            </a:pPr>
+          </a:p>
+          <a:p>
+            <a:pPr>
+              <a:defRPr sz="2200" b="1">
+                <a:solidFill>
+                  <a:srgbClr val="4FC3F7"/>
+                </a:solidFill>
+              </a:defRPr>
+            </a:pPr>
+            <a:r>
+              <a:t>📎  readFiles — 从 jsonl 里提取 read_file 调用</a:t>
+            </a:r>
+          </a:p>
+          <a:p>
+            <a:pPr>
+              <a:spcAft>
+                <a:spcPts val="200"/>
+              </a:spcAft>
+              <a:defRPr sz="1800">
+                <a:solidFill>
+                  <a:srgbClr val="2D2D3F"/>
+                </a:solidFill>
+              </a:defRPr>
+            </a:pPr>
+            <a:r>
+              <a:t>     遍历老版 jsonl → 匹配 tool_calls[].function.name == "read_file"</a:t>
+            </a:r>
+          </a:p>
+          <a:p>
+            <a:pPr>
+              <a:spcAft>
+                <a:spcPts val="200"/>
+              </a:spcAft>
+              <a:defRPr sz="1800">
+                <a:solidFill>
+                  <a:srgbClr val="2D2D3F"/>
+                </a:solidFill>
+              </a:defRPr>
+            </a:pPr>
+            <a:r>
+              <a:t>     提取 path / offset / limit / turn → 组装成新版 readFileRecord 数组</a:t>
+            </a:r>
+          </a:p>
+          <a:p>
+            <a:pPr>
+              <a:spcAft>
+                <a:spcPts val="200"/>
+              </a:spcAft>
+              <a:defRPr sz="1800">
+                <a:solidFill>
+                  <a:srgbClr val="2D2D3F"/>
+                </a:solidFill>
+              </a:defRPr>
+            </a:pPr>
+            <a:r>
+              <a:t>     从老版会话里提取了 190 条依赖文件记录。</a:t>
+            </a:r>
+          </a:p>
+          <a:p>
+            <a:pPr>
+              <a:spcAft>
+                <a:spcPts val="400"/>
+              </a:spcAft>
+            </a:pPr>
+          </a:p>
+          <a:p>
+            <a:pPr>
+              <a:defRPr sz="2200" b="1">
+                <a:solidFill>
+                  <a:srgbClr val="4FC3F7"/>
+                </a:solidFill>
+              </a:defRPr>
+            </a:pPr>
+            <a:r>
+              <a:t>💾  ckpt — 每个用户消息一个 turn-N.json</a:t>
+            </a:r>
+          </a:p>
+          <a:p>
+            <a:pPr>
+              <a:spcAft>
+                <a:spcPts val="200"/>
+              </a:spcAft>
+              <a:defRPr sz="1800">
+                <a:solidFill>
+                  <a:srgbClr val="2D2D3F"/>
+                </a:solidFill>
+              </a:defRPr>
+            </a:pPr>
+            <a:r>
+              <a:t>     {"turn":N,"time":"..","prompt":"前500字","msgIndex":行号,"files":null}</a:t>
+            </a:r>
+          </a:p>
+        </p:txBody>
+      </p:sp>
+      <p:sp>
+        <p:nvSpPr>
+          <p:cNvPr id="4" name="TextBox 3"/>
           <p:cNvSpPr txBox="1"/>
           <p:nvPr/>
         </p:nvSpPr>
         <p:spPr>
           <a:xfrm>
-            <a:off x="1097280" y="1828800"/>
-            <a:ext cx="9966960" cy="4572000"/>
+            <a:off x="457200" y="6400800"/>
+            <a:ext cx="11247120" cy="365760"/>
           </a:xfrm>
           <a:prstGeom prst="rect">
             <a:avLst/>
@@ -3804,197 +5973,20 @@
           <a:noFill/>
         </p:spPr>
         <p:txBody>
-          <a:bodyPr wrap="square">
+          <a:bodyPr wrap="none">
             <a:spAutoFit/>
           </a:bodyPr>
           <a:lstStyle/>
           <a:p>
-            <a:pPr>
-              <a:spcAft>
-                <a:spcPts val="800"/>
-              </a:spcAft>
-              <a:defRPr sz="2200">
-                <a:solidFill>
-                  <a:srgbClr val="333333"/>
-                </a:solidFill>
-              </a:defRPr>
-            </a:pPr>
-            <a:r>
-              <a:t>▎ 技术栈：PowerShell 5.1 + BAT 引导脚本</a:t>
-            </a:r>
-          </a:p>
-          <a:p>
-            <a:pPr>
-              <a:spcAft>
-                <a:spcPts val="800"/>
-              </a:spcAft>
-              <a:defRPr sz="2200">
-                <a:solidFill>
-                  <a:srgbClr val="333333"/>
-                </a:solidFill>
-              </a:defRPr>
-            </a:pPr>
-            <a:r>
-              <a:t>▎ 核心文件：</a:t>
-            </a:r>
-          </a:p>
-          <a:p>
-            <a:pPr>
-              <a:spcAft>
-                <a:spcPts val="800"/>
-              </a:spcAft>
-              <a:defRPr sz="2200">
-                <a:solidFill>
-                  <a:srgbClr val="333333"/>
-                </a:solidFill>
-              </a:defRPr>
-            </a:pPr>
-            <a:r>
-              <a:t>  • 0.53配置迁移到1.X.bat — 用户入口，中文菜单</a:t>
-            </a:r>
-          </a:p>
-          <a:p>
-            <a:pPr>
-              <a:spcAft>
-                <a:spcPts val="800"/>
-              </a:spcAft>
-              <a:defRPr sz="2200">
-                <a:solidFill>
-                  <a:srgbClr val="333333"/>
-                </a:solidFill>
-              </a:defRPr>
-            </a:pPr>
-            <a:r>
-              <a:t>  • Migrate-053to1X.ps1 — 核心脚本，346 行</a:t>
-            </a:r>
-          </a:p>
-          <a:p>
-            <a:pPr>
-              <a:spcAft>
-                <a:spcPts val="800"/>
-              </a:spcAft>
-              <a:defRPr sz="2200">
-                <a:solidFill>
-                  <a:srgbClr val="333333"/>
-                </a:solidFill>
-              </a:defRPr>
-            </a:pPr>
-          </a:p>
-          <a:p>
-            <a:pPr>
-              <a:spcAft>
-                <a:spcPts val="800"/>
-              </a:spcAft>
-              <a:defRPr sz="2200">
-                <a:solidFill>
-                  <a:srgbClr val="333333"/>
-                </a:solidFill>
-              </a:defRPr>
-            </a:pPr>
-            <a:r>
-              <a:t>▎ 执行流程（4 步）：</a:t>
-            </a:r>
-          </a:p>
-          <a:p>
-            <a:pPr>
-              <a:spcAft>
-                <a:spcPts val="800"/>
-              </a:spcAft>
-              <a:defRPr sz="2200">
-                <a:solidFill>
-                  <a:srgbClr val="333333"/>
-                </a:solidFill>
-              </a:defRPr>
-            </a:pPr>
-            <a:r>
-              <a:t>  [1/4] MCP 迁移 — config.json → config.toml</a:t>
-            </a:r>
-          </a:p>
-          <a:p>
-            <a:pPr>
-              <a:spcAft>
-                <a:spcPts val="800"/>
-              </a:spcAft>
-              <a:defRPr sz="2200">
-                <a:solidFill>
-                  <a:srgbClr val="333333"/>
-                </a:solidFill>
-              </a:defRPr>
-            </a:pPr>
-            <a:r>
-              <a:t>  [2/4] 会话迁移 — 重命名 + 四件套（meta/telemetry/ckpt）</a:t>
-            </a:r>
-          </a:p>
-          <a:p>
-            <a:pPr>
-              <a:spcAft>
-                <a:spcPts val="800"/>
-              </a:spcAft>
-              <a:defRPr sz="2200">
-                <a:solidFill>
-                  <a:srgbClr val="333333"/>
-                </a:solidFill>
-              </a:defRPr>
-            </a:pPr>
-            <a:r>
-              <a:t>  [3/4] 记忆迁移 — memory/ 目录完整复制</a:t>
-            </a:r>
-          </a:p>
-          <a:p>
-            <a:pPr>
-              <a:spcAft>
-                <a:spcPts val="800"/>
-              </a:spcAft>
-              <a:defRPr sz="2200">
-                <a:solidFill>
-                  <a:srgbClr val="333333"/>
-                </a:solidFill>
-              </a:defRPr>
-            </a:pPr>
-            <a:r>
-              <a:t>  [4/4] 历史发现 — 分配 topic_id + 清标题文件 + 放迁移标记</a:t>
-            </a:r>
-          </a:p>
-          <a:p>
-            <a:pPr>
-              <a:spcAft>
-                <a:spcPts val="800"/>
-              </a:spcAft>
-              <a:defRPr sz="2200">
-                <a:solidFill>
-                  <a:srgbClr val="333333"/>
-                </a:solidFill>
-              </a:defRPr>
-            </a:pPr>
-          </a:p>
-          <a:p>
-            <a:pPr>
-              <a:spcAft>
-                <a:spcPts val="800"/>
-              </a:spcAft>
-              <a:defRPr sz="2200">
-                <a:solidFill>
-                  <a:srgbClr val="333333"/>
-                </a:solidFill>
-              </a:defRPr>
-            </a:pPr>
-            <a:r>
-              <a:t>▎ 双场景共享：</a:t>
-            </a:r>
-          </a:p>
-          <a:p>
-            <a:pPr>
-              <a:spcAft>
-                <a:spcPts val="800"/>
-              </a:spcAft>
-              <a:defRPr sz="2200">
-                <a:solidFill>
-                  <a:srgbClr val="333333"/>
-                </a:solidFill>
-              </a:defRPr>
-            </a:pPr>
-            <a:r>
-              <a:t>  检测逻辑分叉（C 盘扫描 / 便携自定位），后续 4 步完全统一</a:t>
+            <a:pPr algn="r">
+              <a:defRPr sz="1000">
+                <a:solidFill>
+                  <a:srgbClr val="999999"/>
+                </a:solidFill>
+              </a:defRPr>
+            </a:pPr>
+            <a:r>
+              <a:t>Reasonix Migration Assistant  |  github.com/CS-Faith/reasonix-migration-assistant</a:t>
             </a:r>
           </a:p>
         </p:txBody>
@@ -4013,7 +6005,7 @@
     <p:bg>
       <p:bgPr>
         <a:solidFill>
-          <a:srgbClr val="FAF5F0"/>
+          <a:srgbClr val="F7F8FC"/>
         </a:solidFill>
         <a:effectLst/>
       </p:bgPr>
@@ -4027,14 +6019,66 @@
       <p:grpSpPr/>
       <p:sp>
         <p:nvSpPr>
-          <p:cNvPr id="2" name="TextBox 1"/>
+          <p:cNvPr id="2" name="Rectangle 1"/>
+          <p:cNvSpPr/>
+          <p:nvPr/>
+        </p:nvSpPr>
+        <p:spPr>
+          <a:xfrm>
+            <a:off x="0" y="0"/>
+            <a:ext cx="12188952" cy="1005840"/>
+          </a:xfrm>
+          <a:prstGeom prst="rect">
+            <a:avLst/>
+          </a:prstGeom>
+          <a:solidFill>
+            <a:srgbClr val="1A1A2E"/>
+          </a:solidFill>
+          <a:ln>
+            <a:noFill/>
+          </a:ln>
+        </p:spPr>
+        <p:style>
+          <a:lnRef idx="1">
+            <a:schemeClr val="accent1"/>
+          </a:lnRef>
+          <a:fillRef idx="3">
+            <a:schemeClr val="accent1"/>
+          </a:fillRef>
+          <a:effectRef idx="2">
+            <a:schemeClr val="accent1"/>
+          </a:effectRef>
+          <a:fontRef idx="minor">
+            <a:schemeClr val="lt1"/>
+          </a:fontRef>
+        </p:style>
+        <p:txBody>
+          <a:bodyPr rtlCol="0" anchor="ctr" wrap="square"/>
+          <a:lstStyle/>
+          <a:p>
+            <a:pPr algn="l">
+              <a:defRPr sz="3200" b="1">
+                <a:solidFill>
+                  <a:srgbClr val="FFFFFF"/>
+                </a:solidFill>
+              </a:defRPr>
+            </a:pPr>
+            <a:r>
+              <a:t>  最惨烈的坑：BOM 问题 — 修了 123 个文件才定位</a:t>
+            </a:r>
+          </a:p>
+        </p:txBody>
+      </p:sp>
+      <p:sp>
+        <p:nvSpPr>
+          <p:cNvPr id="3" name="TextBox 2"/>
           <p:cNvSpPr txBox="1"/>
           <p:nvPr/>
         </p:nvSpPr>
         <p:spPr>
           <a:xfrm>
-            <a:off x="731520" y="457200"/>
-            <a:ext cx="10698480" cy="1097280"/>
+            <a:off x="457200" y="1188720"/>
+            <a:ext cx="5669280" cy="5303520"/>
           </a:xfrm>
           <a:prstGeom prst="rect">
             <a:avLst/>
@@ -4048,28 +6092,176 @@
           <a:lstStyle/>
           <a:p>
             <a:pPr>
-              <a:defRPr sz="3600" b="1">
-                <a:solidFill>
-                  <a:srgbClr val="1A1A2E"/>
-                </a:solidFill>
-              </a:defRPr>
-            </a:pPr>
-            <a:r>
-              <a:t>技术实现 — 关键难点</a:t>
-            </a:r>
-          </a:p>
-        </p:txBody>
-      </p:sp>
-      <p:sp>
-        <p:nvSpPr>
-          <p:cNvPr id="3" name="TextBox 2"/>
+              <a:defRPr sz="2200" b="1">
+                <a:solidFill>
+                  <a:srgbClr val="FF7050"/>
+                </a:solidFill>
+              </a:defRPr>
+            </a:pPr>
+            <a:r>
+              <a:t>症 状</a:t>
+            </a:r>
+          </a:p>
+          <a:p>
+            <a:pPr>
+              <a:spcAft>
+                <a:spcPts val="200"/>
+              </a:spcAft>
+              <a:defRPr sz="1700">
+                <a:solidFill>
+                  <a:srgbClr val="2D2D3F"/>
+                </a:solidFill>
+              </a:defRPr>
+            </a:pPr>
+          </a:p>
+          <a:p>
+            <a:pPr>
+              <a:spcAft>
+                <a:spcPts val="200"/>
+              </a:spcAft>
+              <a:defRPr sz="1700">
+                <a:solidFill>
+                  <a:srgbClr val="2D2D3F"/>
+                </a:solidFill>
+              </a:defRPr>
+            </a:pPr>
+            <a:r>
+              <a:t>历史对话列表能看到迁移的会话 ✓</a:t>
+            </a:r>
+          </a:p>
+          <a:p>
+            <a:pPr>
+              <a:spcAft>
+                <a:spcPts val="200"/>
+              </a:spcAft>
+              <a:defRPr sz="1700">
+                <a:solidFill>
+                  <a:srgbClr val="2D2D3F"/>
+                </a:solidFill>
+              </a:defRPr>
+            </a:pPr>
+            <a:r>
+              <a:t>标题正确 ✓  轮数正确 ✓</a:t>
+            </a:r>
+          </a:p>
+          <a:p>
+            <a:pPr>
+              <a:spcAft>
+                <a:spcPts val="200"/>
+              </a:spcAft>
+              <a:defRPr sz="1700">
+                <a:solidFill>
+                  <a:srgbClr val="2D2D3F"/>
+                </a:solidFill>
+              </a:defRPr>
+            </a:pPr>
+            <a:r>
+              <a:t>点「打开会话」→  永远报错 ✗</a:t>
+            </a:r>
+          </a:p>
+          <a:p>
+            <a:pPr>
+              <a:spcAft>
+                <a:spcPts val="800"/>
+              </a:spcAft>
+            </a:pPr>
+          </a:p>
+          <a:p>
+            <a:pPr>
+              <a:defRPr sz="2200" b="1">
+                <a:solidFill>
+                  <a:srgbClr val="66BB6A"/>
+                </a:solidFill>
+              </a:defRPr>
+            </a:pPr>
+            <a:r>
+              <a:t>根 因 追 踪</a:t>
+            </a:r>
+          </a:p>
+          <a:p>
+            <a:pPr>
+              <a:spcAft>
+                <a:spcPts val="200"/>
+              </a:spcAft>
+              <a:defRPr sz="1600">
+                <a:solidFill>
+                  <a:srgbClr val="2D2D3F"/>
+                </a:solidFill>
+              </a:defRPr>
+            </a:pPr>
+          </a:p>
+          <a:p>
+            <a:pPr>
+              <a:spcAft>
+                <a:spcPts val="200"/>
+              </a:spcAft>
+              <a:defRPr sz="1600">
+                <a:solidFill>
+                  <a:srgbClr val="2D2D3F"/>
+                </a:solidFill>
+              </a:defRPr>
+            </a:pPr>
+            <a:r>
+              <a:t>1. findTopicSession() → LoadBranchMeta()</a:t>
+            </a:r>
+          </a:p>
+          <a:p>
+            <a:pPr>
+              <a:spcAft>
+                <a:spcPts val="200"/>
+              </a:spcAft>
+              <a:defRPr sz="1600">
+                <a:solidFill>
+                  <a:srgbClr val="2D2D3F"/>
+                </a:solidFill>
+              </a:defRPr>
+            </a:pPr>
+            <a:r>
+              <a:t>2. LoadBranchMeta() → Go json.Unmarshal()</a:t>
+            </a:r>
+          </a:p>
+          <a:p>
+            <a:pPr>
+              <a:spcAft>
+                <a:spcPts val="200"/>
+              </a:spcAft>
+              <a:defRPr sz="1600">
+                <a:solidFill>
+                  <a:srgbClr val="2D2D3F"/>
+                </a:solidFill>
+              </a:defRPr>
+            </a:pPr>
+            <a:r>
+              <a:t>3. Go json.Unmarshal 不跳过 BOM (0xEF BB BF)</a:t>
+            </a:r>
+          </a:p>
+          <a:p>
+            <a:pPr>
+              <a:spcAft>
+                <a:spcPts val="200"/>
+              </a:spcAft>
+              <a:defRPr sz="1600">
+                <a:solidFill>
+                  <a:srgbClr val="2D2D3F"/>
+                </a:solidFill>
+              </a:defRPr>
+            </a:pPr>
+            <a:r>
+              <a:t>4. PowerShell Set-Content -Encoding UTF8 默认写入 BOM</a:t>
+            </a:r>
+          </a:p>
+        </p:txBody>
+      </p:sp>
+      <p:sp>
+        <p:nvSpPr>
+          <p:cNvPr id="4" name="TextBox 3"/>
           <p:cNvSpPr txBox="1"/>
           <p:nvPr/>
         </p:nvSpPr>
         <p:spPr>
           <a:xfrm>
-            <a:off x="1097280" y="1828800"/>
-            <a:ext cx="9966960" cy="4572000"/>
+            <a:off x="6583680" y="1188720"/>
+            <a:ext cx="5303520" cy="5303520"/>
           </a:xfrm>
           <a:prstGeom prst="rect">
             <a:avLst/>
@@ -4083,218 +6275,208 @@
           <a:lstStyle/>
           <a:p>
             <a:pPr>
+              <a:defRPr sz="1800" b="1">
+                <a:solidFill>
+                  <a:srgbClr val="7C4DFF"/>
+                </a:solidFill>
+              </a:defRPr>
+            </a:pPr>
+            <a:r>
+              <a:t>流 程 对 比</a:t>
+            </a:r>
+          </a:p>
+          <a:p>
+            <a:pPr>
               <a:spcAft>
                 <a:spcPts val="800"/>
               </a:spcAft>
-              <a:defRPr sz="2200">
-                <a:solidFill>
-                  <a:srgbClr val="333333"/>
-                </a:solidFill>
-              </a:defRPr>
-            </a:pPr>
-            <a:r>
-              <a:t>▎ 数据格式逆向</a:t>
-            </a:r>
-          </a:p>
-          <a:p>
-            <a:pPr>
-              <a:spcAft>
-                <a:spcPts val="800"/>
-              </a:spcAft>
-              <a:defRPr sz="2200">
-                <a:solidFill>
-                  <a:srgbClr val="333333"/>
-                </a:solidFill>
-              </a:defRPr>
-            </a:pPr>
-            <a:r>
-              <a:t>  • 通过阅读 GitHub Go 源码，反推 BranchMeta/telemetry/ckpt 格式</a:t>
-            </a:r>
-          </a:p>
-          <a:p>
-            <a:pPr>
-              <a:spcAft>
-                <a:spcPts val="800"/>
-              </a:spcAft>
-              <a:defRPr sz="2200">
-                <a:solidFill>
-                  <a:srgbClr val="333333"/>
-                </a:solidFill>
-              </a:defRPr>
-            </a:pPr>
-            <a:r>
-              <a:t>  • snake_case JSON 字段名、RFC3339 时间格式、omitempty 处理</a:t>
-            </a:r>
-          </a:p>
-          <a:p>
-            <a:pPr>
-              <a:spcAft>
-                <a:spcPts val="800"/>
-              </a:spcAft>
-              <a:defRPr sz="2200">
-                <a:solidFill>
-                  <a:srgbClr val="333333"/>
-                </a:solidFill>
-              </a:defRPr>
-            </a:pPr>
-          </a:p>
-          <a:p>
-            <a:pPr>
-              <a:spcAft>
-                <a:spcPts val="800"/>
-              </a:spcAft>
-              <a:defRPr sz="2200">
-                <a:solidFill>
-                  <a:srgbClr val="333333"/>
-                </a:solidFill>
-              </a:defRPr>
-            </a:pPr>
-            <a:r>
-              <a:t>▎ BOM 陷阱 (最隐蔽的 bug)</a:t>
-            </a:r>
-          </a:p>
-          <a:p>
-            <a:pPr>
-              <a:spcAft>
-                <a:spcPts val="800"/>
-              </a:spcAft>
-              <a:defRPr sz="2200">
-                <a:solidFill>
-                  <a:srgbClr val="333333"/>
-                </a:solidFill>
-              </a:defRPr>
-            </a:pPr>
-            <a:r>
-              <a:t>  • PowerShell Set-Content 默认写入 UTF-8 BOM</a:t>
-            </a:r>
-          </a:p>
-          <a:p>
-            <a:pPr>
-              <a:spcAft>
-                <a:spcPts val="800"/>
-              </a:spcAft>
-              <a:defRPr sz="2200">
-                <a:solidFill>
-                  <a:srgbClr val="333333"/>
-                </a:solidFill>
-              </a:defRPr>
-            </a:pPr>
-            <a:r>
-              <a:t>  • Go json.Unmarshal 不跳过 BOM → meta 解析失败 → 会话打不开</a:t>
-            </a:r>
-          </a:p>
-          <a:p>
-            <a:pPr>
-              <a:spcAft>
-                <a:spcPts val="800"/>
-              </a:spcAft>
-              <a:defRPr sz="2200">
-                <a:solidFill>
-                  <a:srgbClr val="333333"/>
-                </a:solidFill>
-              </a:defRPr>
-            </a:pPr>
-            <a:r>
-              <a:t>  • 解决：全程使用 [System.IO.File]::WriteAllText + 无 BOM 编码</a:t>
-            </a:r>
-          </a:p>
-          <a:p>
-            <a:pPr>
-              <a:spcAft>
-                <a:spcPts val="800"/>
-              </a:spcAft>
-              <a:defRPr sz="2200">
-                <a:solidFill>
-                  <a:srgbClr val="333333"/>
-                </a:solidFill>
-              </a:defRPr>
-            </a:pPr>
-          </a:p>
-          <a:p>
-            <a:pPr>
-              <a:spcAft>
-                <a:spcPts val="800"/>
-              </a:spcAft>
-              <a:defRPr sz="2200">
-                <a:solidFill>
-                  <a:srgbClr val="333333"/>
-                </a:solidFill>
-              </a:defRPr>
-            </a:pPr>
-            <a:r>
-              <a:t>▎ 侧边栏污染</a:t>
-            </a:r>
-          </a:p>
-          <a:p>
-            <a:pPr>
-              <a:spcAft>
-                <a:spcPts val="800"/>
-              </a:spcAft>
-              <a:defRPr sz="2200">
-                <a:solidFill>
-                  <a:srgbClr val="333333"/>
-                </a:solidFill>
-              </a:defRPr>
-            </a:pPr>
-            <a:r>
-              <a:t>  • orderedTopicIDs() 遍历 titleMap 所有 key，不限于 globalTopics</a:t>
-            </a:r>
-          </a:p>
-          <a:p>
-            <a:pPr>
-              <a:spcAft>
-                <a:spcPts val="800"/>
-              </a:spcAft>
-              <a:defRPr sz="2200">
-                <a:solidFill>
-                  <a:srgbClr val="333333"/>
-                </a:solidFill>
-              </a:defRPr>
-            </a:pPr>
-            <a:r>
-              <a:t>  • 解决：清空 desktop-topic-titles.json + 放置迁移标记文件</a:t>
-            </a:r>
-          </a:p>
-          <a:p>
-            <a:pPr>
-              <a:spcAft>
-                <a:spcPts val="800"/>
-              </a:spcAft>
-              <a:defRPr sz="2200">
-                <a:solidFill>
-                  <a:srgbClr val="333333"/>
-                </a:solidFill>
-              </a:defRPr>
-            </a:pPr>
-          </a:p>
-          <a:p>
-            <a:pPr>
-              <a:spcAft>
-                <a:spcPts val="800"/>
-              </a:spcAft>
-              <a:defRPr sz="2200">
-                <a:solidFill>
-                  <a:srgbClr val="333333"/>
-                </a:solidFill>
-              </a:defRPr>
-            </a:pPr>
-            <a:r>
-              <a:t>▎ readFiles 提取</a:t>
-            </a:r>
-          </a:p>
-          <a:p>
-            <a:pPr>
-              <a:spcAft>
-                <a:spcPts val="800"/>
-              </a:spcAft>
-              <a:defRPr sz="2200">
-                <a:solidFill>
-                  <a:srgbClr val="333333"/>
-                </a:solidFill>
-              </a:defRPr>
-            </a:pPr>
-            <a:r>
-              <a:t>  • 从 0.53 jsonl 的工具调用记录中解析 read_file 路径和参数</a:t>
+            </a:pPr>
+          </a:p>
+          <a:p>
+            <a:pPr>
+              <a:defRPr sz="2000" b="1">
+                <a:solidFill>
+                  <a:srgbClr val="FF7050"/>
+                </a:solidFill>
+              </a:defRPr>
+            </a:pPr>
+            <a:r>
+              <a:t>这 个 bug 修 了 123 个 meta 文 件</a:t>
+            </a:r>
+          </a:p>
+        </p:txBody>
+      </p:sp>
+      <p:sp>
+        <p:nvSpPr>
+          <p:cNvPr id="5" name="Rectangle 4"/>
+          <p:cNvSpPr/>
+          <p:nvPr/>
+        </p:nvSpPr>
+        <p:spPr>
+          <a:xfrm>
+            <a:off x="6583680" y="1828800"/>
+            <a:ext cx="5303520" cy="1371600"/>
+          </a:xfrm>
+          <a:prstGeom prst="rect">
+            <a:avLst/>
+          </a:prstGeom>
+          <a:solidFill>
+            <a:srgbClr val="1E2A3A"/>
+          </a:solidFill>
+          <a:ln>
+            <a:noFill/>
+          </a:ln>
+        </p:spPr>
+        <p:style>
+          <a:lnRef idx="1">
+            <a:schemeClr val="accent1"/>
+          </a:lnRef>
+          <a:fillRef idx="3">
+            <a:schemeClr val="accent1"/>
+          </a:fillRef>
+          <a:effectRef idx="2">
+            <a:schemeClr val="accent1"/>
+          </a:effectRef>
+          <a:fontRef idx="minor">
+            <a:schemeClr val="lt1"/>
+          </a:fontRef>
+        </p:style>
+        <p:txBody>
+          <a:bodyPr rtlCol="0" anchor="ctr" wrap="square"/>
+          <a:lstStyle/>
+          <a:p>
+            <a:pPr algn="ctr">
+              <a:spcAft>
+                <a:spcPts val="0"/>
+              </a:spcAft>
+              <a:defRPr sz="1300">
+                <a:solidFill>
+                  <a:srgbClr val="A5D6FF"/>
+                </a:solidFill>
+                <a:latin typeface="Consolas"/>
+              </a:defRPr>
+            </a:pPr>
+            <a:r>
+              <a:t># ❌ Set-Content  (有 BOM)</a:t>
+            </a:r>
+            <a:br/>
+            <a:r>
+              <a:t>Set-Content $path $data -Encoding UTF8</a:t>
+            </a:r>
+            <a:br/>
+            <a:r>
+              <a:t># → 文件: EF BB BF 7B 22 ...</a:t>
+            </a:r>
+            <a:br/>
+            <a:r>
+              <a:t># → Go 解析: 非法字符 → 失败</a:t>
+            </a:r>
+          </a:p>
+        </p:txBody>
+      </p:sp>
+      <p:sp>
+        <p:nvSpPr>
+          <p:cNvPr id="6" name="Rectangle 5"/>
+          <p:cNvSpPr/>
+          <p:nvPr/>
+        </p:nvSpPr>
+        <p:spPr>
+          <a:xfrm>
+            <a:off x="6583680" y="3474720"/>
+            <a:ext cx="5303520" cy="1371600"/>
+          </a:xfrm>
+          <a:prstGeom prst="rect">
+            <a:avLst/>
+          </a:prstGeom>
+          <a:solidFill>
+            <a:srgbClr val="1E2A3A"/>
+          </a:solidFill>
+          <a:ln>
+            <a:noFill/>
+          </a:ln>
+        </p:spPr>
+        <p:style>
+          <a:lnRef idx="1">
+            <a:schemeClr val="accent1"/>
+          </a:lnRef>
+          <a:fillRef idx="3">
+            <a:schemeClr val="accent1"/>
+          </a:fillRef>
+          <a:effectRef idx="2">
+            <a:schemeClr val="accent1"/>
+          </a:effectRef>
+          <a:fontRef idx="minor">
+            <a:schemeClr val="lt1"/>
+          </a:fontRef>
+        </p:style>
+        <p:txBody>
+          <a:bodyPr rtlCol="0" anchor="ctr" wrap="square"/>
+          <a:lstStyle/>
+          <a:p>
+            <a:pPr algn="ctr">
+              <a:spcAft>
+                <a:spcPts val="0"/>
+              </a:spcAft>
+              <a:defRPr sz="1300">
+                <a:solidFill>
+                  <a:srgbClr val="A5D6FF"/>
+                </a:solidFill>
+                <a:latin typeface="Consolas"/>
+              </a:defRPr>
+            </a:pPr>
+            <a:r>
+              <a:t># ✅ WriteAllText  (无 BOM)</a:t>
+            </a:r>
+            <a:br/>
+            <a:r>
+              <a:t>$enc = [Text.UTF8Encoding]::new($false)</a:t>
+            </a:r>
+            <a:br/>
+            <a:r>
+              <a:t>[IO.File]::WriteAllText($path, $data, $enc)</a:t>
+            </a:r>
+            <a:br/>
+            <a:r>
+              <a:t># → 文件: 7B 22 69 64 22 ...</a:t>
+            </a:r>
+            <a:br/>
+            <a:r>
+              <a:t># → Go 解析: 成功 ✓</a:t>
+            </a:r>
+          </a:p>
+        </p:txBody>
+      </p:sp>
+      <p:sp>
+        <p:nvSpPr>
+          <p:cNvPr id="7" name="TextBox 6"/>
+          <p:cNvSpPr txBox="1"/>
+          <p:nvPr/>
+        </p:nvSpPr>
+        <p:spPr>
+          <a:xfrm>
+            <a:off x="457200" y="6400800"/>
+            <a:ext cx="11247120" cy="365760"/>
+          </a:xfrm>
+          <a:prstGeom prst="rect">
+            <a:avLst/>
+          </a:prstGeom>
+          <a:noFill/>
+        </p:spPr>
+        <p:txBody>
+          <a:bodyPr wrap="none">
+            <a:spAutoFit/>
+          </a:bodyPr>
+          <a:lstStyle/>
+          <a:p>
+            <a:pPr algn="r">
+              <a:defRPr sz="1000">
+                <a:solidFill>
+                  <a:srgbClr val="999999"/>
+                </a:solidFill>
+              </a:defRPr>
+            </a:pPr>
+            <a:r>
+              <a:t>Reasonix Migration Assistant  |  github.com/CS-Faith/reasonix-migration-assistant</a:t>
             </a:r>
           </a:p>
         </p:txBody>
@@ -4313,7 +6495,7 @@
     <p:bg>
       <p:bgPr>
         <a:solidFill>
-          <a:srgbClr val="F0F5FA"/>
+          <a:srgbClr val="F7F8FC"/>
         </a:solidFill>
         <a:effectLst/>
       </p:bgPr>
@@ -4327,14 +6509,66 @@
       <p:grpSpPr/>
       <p:sp>
         <p:nvSpPr>
-          <p:cNvPr id="2" name="TextBox 1"/>
+          <p:cNvPr id="2" name="Rectangle 1"/>
+          <p:cNvSpPr/>
+          <p:nvPr/>
+        </p:nvSpPr>
+        <p:spPr>
+          <a:xfrm>
+            <a:off x="0" y="0"/>
+            <a:ext cx="12188952" cy="1005840"/>
+          </a:xfrm>
+          <a:prstGeom prst="rect">
+            <a:avLst/>
+          </a:prstGeom>
+          <a:solidFill>
+            <a:srgbClr val="1A1A2E"/>
+          </a:solidFill>
+          <a:ln>
+            <a:noFill/>
+          </a:ln>
+        </p:spPr>
+        <p:style>
+          <a:lnRef idx="1">
+            <a:schemeClr val="accent1"/>
+          </a:lnRef>
+          <a:fillRef idx="3">
+            <a:schemeClr val="accent1"/>
+          </a:fillRef>
+          <a:effectRef idx="2">
+            <a:schemeClr val="accent1"/>
+          </a:effectRef>
+          <a:fontRef idx="minor">
+            <a:schemeClr val="lt1"/>
+          </a:fontRef>
+        </p:style>
+        <p:txBody>
+          <a:bodyPr rtlCol="0" anchor="ctr" wrap="square"/>
+          <a:lstStyle/>
+          <a:p>
+            <a:pPr algn="l">
+              <a:defRPr sz="3200" b="1">
+                <a:solidFill>
+                  <a:srgbClr val="FFFFFF"/>
+                </a:solidFill>
+              </a:defRPr>
+            </a:pPr>
+            <a:r>
+              <a:t>  技术细节 ③：侧边栏为什么被刷屏？</a:t>
+            </a:r>
+          </a:p>
+        </p:txBody>
+      </p:sp>
+      <p:sp>
+        <p:nvSpPr>
+          <p:cNvPr id="3" name="TextBox 2"/>
           <p:cNvSpPr txBox="1"/>
           <p:nvPr/>
         </p:nvSpPr>
         <p:spPr>
           <a:xfrm>
-            <a:off x="731520" y="457200"/>
-            <a:ext cx="10698480" cy="1097280"/>
+            <a:off x="457200" y="1280160"/>
+            <a:ext cx="6400800" cy="5303520"/>
           </a:xfrm>
           <a:prstGeom prst="rect">
             <a:avLst/>
@@ -4348,28 +6582,120 @@
           <a:lstStyle/>
           <a:p>
             <a:pPr>
-              <a:defRPr sz="3600" b="1">
-                <a:solidFill>
-                  <a:srgbClr val="1A1A2E"/>
-                </a:solidFill>
-              </a:defRPr>
-            </a:pPr>
-            <a:r>
-              <a:t>使用方法 — 场景一：标准升级</a:t>
-            </a:r>
-          </a:p>
-        </p:txBody>
-      </p:sp>
-      <p:sp>
-        <p:nvSpPr>
-          <p:cNvPr id="3" name="TextBox 2"/>
+              <a:defRPr sz="2000" b="1">
+                <a:solidFill>
+                  <a:srgbClr val="7C4DFF"/>
+                </a:solidFill>
+              </a:defRPr>
+            </a:pPr>
+            <a:r>
+              <a:t>orderedTopicIDs() — tabs.go 第 1519 行</a:t>
+            </a:r>
+          </a:p>
+        </p:txBody>
+      </p:sp>
+      <p:sp>
+        <p:nvSpPr>
+          <p:cNvPr id="4" name="Rectangle 3"/>
+          <p:cNvSpPr/>
+          <p:nvPr/>
+        </p:nvSpPr>
+        <p:spPr>
+          <a:xfrm>
+            <a:off x="457200" y="1828800"/>
+            <a:ext cx="6583680" cy="2560320"/>
+          </a:xfrm>
+          <a:prstGeom prst="rect">
+            <a:avLst/>
+          </a:prstGeom>
+          <a:solidFill>
+            <a:srgbClr val="1E2A3A"/>
+          </a:solidFill>
+          <a:ln>
+            <a:noFill/>
+          </a:ln>
+        </p:spPr>
+        <p:style>
+          <a:lnRef idx="1">
+            <a:schemeClr val="accent1"/>
+          </a:lnRef>
+          <a:fillRef idx="3">
+            <a:schemeClr val="accent1"/>
+          </a:fillRef>
+          <a:effectRef idx="2">
+            <a:schemeClr val="accent1"/>
+          </a:effectRef>
+          <a:fontRef idx="minor">
+            <a:schemeClr val="lt1"/>
+          </a:fontRef>
+        </p:style>
+        <p:txBody>
+          <a:bodyPr rtlCol="0" anchor="ctr" wrap="square"/>
+          <a:lstStyle/>
+          <a:p>
+            <a:pPr algn="ctr">
+              <a:spcAft>
+                <a:spcPts val="0"/>
+              </a:spcAft>
+              <a:defRPr sz="1300">
+                <a:solidFill>
+                  <a:srgbClr val="A5D6FF"/>
+                </a:solidFill>
+                <a:latin typeface="Consolas"/>
+              </a:defRPr>
+            </a:pPr>
+            <a:r>
+              <a:t>func orderedTopicIDs(explicit []string, titleMap map[string]string) {</a:t>
+            </a:r>
+            <a:br/>
+            <a:r>
+              <a:t>    for _, tid := range explicit {</a:t>
+            </a:r>
+            <a:br/>
+            <a:r>
+              <a:t>        out = append(out, tid)   // ← 显式列表</a:t>
+            </a:r>
+            <a:br/>
+            <a:r>
+              <a:t>    }</a:t>
+            </a:r>
+            <a:br/>
+            <a:r>
+              <a:t>    for tid := range titleMap {  // ← 遍历 titleMap 所有 key！</a:t>
+            </a:r>
+            <a:br/>
+            <a:r>
+              <a:t>        if !seen[tid] {</a:t>
+            </a:r>
+            <a:br/>
+            <a:r>
+              <a:t>            out = append(out, tid)</a:t>
+            </a:r>
+            <a:br/>
+            <a:r>
+              <a:t>        }</a:t>
+            </a:r>
+            <a:br/>
+            <a:r>
+              <a:t>    }</a:t>
+            </a:r>
+            <a:br/>
+            <a:r>
+              <a:t>}</a:t>
+            </a:r>
+          </a:p>
+        </p:txBody>
+      </p:sp>
+      <p:sp>
+        <p:nvSpPr>
+          <p:cNvPr id="5" name="TextBox 4"/>
           <p:cNvSpPr txBox="1"/>
           <p:nvPr/>
         </p:nvSpPr>
         <p:spPr>
           <a:xfrm>
-            <a:off x="1097280" y="1828800"/>
-            <a:ext cx="9966960" cy="4572000"/>
+            <a:off x="457200" y="4572000"/>
+            <a:ext cx="10972800" cy="1371600"/>
           </a:xfrm>
           <a:prstGeom prst="rect">
             <a:avLst/>
@@ -4383,206 +6709,197 @@
           <a:lstStyle/>
           <a:p>
             <a:pPr>
-              <a:spcAft>
+              <a:defRPr sz="1800">
+                <a:solidFill>
+                  <a:srgbClr val="FF7050"/>
+                </a:solidFill>
+              </a:defRPr>
+            </a:pPr>
+            <a:r>
+              <a:t>即使 desktop-projects.json 里 globalTopics 为空，只要 desktop-topic-titles.json 有 128 个 key，侧边栏就显示 128 条。</a:t>
+            </a:r>
+          </a:p>
+          <a:p>
+            <a:pPr>
+              <a:spcBef>
                 <a:spcPts val="800"/>
-              </a:spcAft>
-              <a:defRPr sz="2200">
-                <a:solidFill>
-                  <a:srgbClr val="333333"/>
-                </a:solidFill>
-              </a:defRPr>
-            </a:pPr>
-            <a:r>
-              <a:t>▎ 适用：C 盘安装版 0.53 → 已装新版</a:t>
-            </a:r>
-          </a:p>
-          <a:p>
-            <a:pPr>
-              <a:spcAft>
-                <a:spcPts val="800"/>
-              </a:spcAft>
-              <a:defRPr sz="2200">
-                <a:solidFill>
-                  <a:srgbClr val="333333"/>
-                </a:solidFill>
-              </a:defRPr>
-            </a:pPr>
-          </a:p>
-          <a:p>
-            <a:pPr>
-              <a:spcAft>
-                <a:spcPts val="800"/>
-              </a:spcAft>
-              <a:defRPr sz="2200">
-                <a:solidFill>
-                  <a:srgbClr val="333333"/>
-                </a:solidFill>
-              </a:defRPr>
-            </a:pPr>
-            <a:r>
-              <a:t>▎ 步骤：</a:t>
-            </a:r>
-          </a:p>
-          <a:p>
-            <a:pPr>
-              <a:spcAft>
-                <a:spcPts val="800"/>
-              </a:spcAft>
-              <a:defRPr sz="2200">
-                <a:solidFill>
-                  <a:srgbClr val="333333"/>
-                </a:solidFill>
-              </a:defRPr>
-            </a:pPr>
-            <a:r>
-              <a:t>  1. 确保新版 Reasonix 已安装并至少启动过一次</a:t>
-            </a:r>
-          </a:p>
-          <a:p>
-            <a:pPr>
-              <a:spcAft>
-                <a:spcPts val="800"/>
-              </a:spcAft>
-              <a:defRPr sz="2200">
-                <a:solidFill>
-                  <a:srgbClr val="333333"/>
-                </a:solidFill>
-              </a:defRPr>
-            </a:pPr>
-            <a:r>
-              <a:t>  2. 双击「0.53配置迁移到1.X.bat」</a:t>
-            </a:r>
-          </a:p>
-          <a:p>
-            <a:pPr>
-              <a:spcAft>
-                <a:spcPts val="800"/>
-              </a:spcAft>
-              <a:defRPr sz="2200">
-                <a:solidFill>
-                  <a:srgbClr val="333333"/>
-                </a:solidFill>
-              </a:defRPr>
-            </a:pPr>
-            <a:r>
-              <a:t>  3. 选择 [1] 标准升级</a:t>
-            </a:r>
-          </a:p>
-          <a:p>
-            <a:pPr>
-              <a:spcAft>
-                <a:spcPts val="800"/>
-              </a:spcAft>
-              <a:defRPr sz="2200">
-                <a:solidFill>
-                  <a:srgbClr val="333333"/>
-                </a:solidFill>
-              </a:defRPr>
-            </a:pPr>
-            <a:r>
-              <a:t>  4. 工具自动检测 C 盘数据，执行迁移</a:t>
-            </a:r>
-          </a:p>
-          <a:p>
-            <a:pPr>
-              <a:spcAft>
-                <a:spcPts val="800"/>
-              </a:spcAft>
-              <a:defRPr sz="2200">
-                <a:solidFill>
-                  <a:srgbClr val="333333"/>
-                </a:solidFill>
-              </a:defRPr>
-            </a:pPr>
-            <a:r>
-              <a:t>  5. 启动新版 Reasonix → 点击「历史对话」查看</a:t>
-            </a:r>
-          </a:p>
-          <a:p>
-            <a:pPr>
-              <a:spcAft>
-                <a:spcPts val="800"/>
-              </a:spcAft>
-              <a:defRPr sz="2200">
-                <a:solidFill>
-                  <a:srgbClr val="333333"/>
-                </a:solidFill>
-              </a:defRPr>
-            </a:pPr>
-          </a:p>
-          <a:p>
-            <a:pPr>
-              <a:spcAft>
-                <a:spcPts val="800"/>
-              </a:spcAft>
-              <a:defRPr sz="2200">
-                <a:solidFill>
-                  <a:srgbClr val="333333"/>
-                </a:solidFill>
-              </a:defRPr>
-            </a:pPr>
-            <a:r>
-              <a:t>▎ 效果：</a:t>
-            </a:r>
-          </a:p>
-          <a:p>
-            <a:pPr>
-              <a:spcAft>
-                <a:spcPts val="800"/>
-              </a:spcAft>
-              <a:defRPr sz="2200">
-                <a:solidFill>
-                  <a:srgbClr val="333333"/>
-                </a:solidFill>
-              </a:defRPr>
-            </a:pPr>
-            <a:r>
-              <a:t>  ✅ 侧边栏不受影响</a:t>
-            </a:r>
-          </a:p>
-          <a:p>
-            <a:pPr>
-              <a:spcAft>
-                <a:spcPts val="800"/>
-              </a:spcAft>
-              <a:defRPr sz="2200">
-                <a:solidFill>
-                  <a:srgbClr val="333333"/>
-                </a:solidFill>
-              </a:defRPr>
-            </a:pPr>
-            <a:r>
-              <a:t>  ✅ 历史对话列表显示全部迁移会话</a:t>
-            </a:r>
-          </a:p>
-          <a:p>
-            <a:pPr>
-              <a:spcAft>
-                <a:spcPts val="800"/>
-              </a:spcAft>
-              <a:defRPr sz="2200">
-                <a:solidFill>
-                  <a:srgbClr val="333333"/>
-                </a:solidFill>
-              </a:defRPr>
-            </a:pPr>
-            <a:r>
-              <a:t>  ✅ 每条会话保留原始对话标题</a:t>
-            </a:r>
-          </a:p>
-          <a:p>
-            <a:pPr>
-              <a:spcAft>
-                <a:spcPts val="800"/>
-              </a:spcAft>
-              <a:defRPr sz="2200">
-                <a:solidFill>
-                  <a:srgbClr val="333333"/>
-                </a:solidFill>
-              </a:defRPr>
-            </a:pPr>
-            <a:r>
-              <a:t>  ✅ 打开会话可继续未完成的对话</a:t>
+              </a:spcBef>
+              <a:defRPr sz="1800">
+                <a:solidFill>
+                  <a:srgbClr val="66BB6A"/>
+                </a:solidFill>
+              </a:defRPr>
+            </a:pPr>
+            <a:r>
+              <a:t>解决：迁移前清空两个 title 文件 + 放 .legacy-imported.v2-routed 标记阻止新版自动扫描。</a:t>
+            </a:r>
+          </a:p>
+        </p:txBody>
+      </p:sp>
+      <p:sp>
+        <p:nvSpPr>
+          <p:cNvPr id="6" name="TextBox 5"/>
+          <p:cNvSpPr txBox="1"/>
+          <p:nvPr/>
+        </p:nvSpPr>
+        <p:spPr>
+          <a:xfrm>
+            <a:off x="7498079" y="1280160"/>
+            <a:ext cx="4389120" cy="3657600"/>
+          </a:xfrm>
+          <a:prstGeom prst="rect">
+            <a:avLst/>
+          </a:prstGeom>
+          <a:noFill/>
+        </p:spPr>
+        <p:txBody>
+          <a:bodyPr wrap="square">
+            <a:spAutoFit/>
+          </a:bodyPr>
+          <a:lstStyle/>
+          <a:p/>
+          <a:p>
+            <a:pPr>
+              <a:spcAft>
+                <a:spcPts val="400"/>
+              </a:spcAft>
+            </a:pPr>
+          </a:p>
+          <a:p>
+            <a:pPr>
+              <a:defRPr sz="1800" b="1">
+                <a:solidFill>
+                  <a:srgbClr val="4FC3F7"/>
+                </a:solidFill>
+              </a:defRPr>
+            </a:pPr>
+            <a:r>
+              <a:t>  三小时追踪过程</a:t>
+            </a:r>
+          </a:p>
+          <a:p>
+            <a:pPr>
+              <a:spcAft>
+                <a:spcPts val="200"/>
+              </a:spcAft>
+              <a:defRPr sz="1500">
+                <a:solidFill>
+                  <a:srgbClr val="2D2D3F"/>
+                </a:solidFill>
+              </a:defRPr>
+            </a:pPr>
+            <a:r>
+              <a:t>     以为是 desktop-projects.json 的问题</a:t>
+            </a:r>
+          </a:p>
+          <a:p>
+            <a:pPr>
+              <a:spcAft>
+                <a:spcPts val="200"/>
+              </a:spcAft>
+              <a:defRPr sz="1500">
+                <a:solidFill>
+                  <a:srgbClr val="2D2D3F"/>
+                </a:solidFill>
+              </a:defRPr>
+            </a:pPr>
+            <a:r>
+              <a:t>     → 清空，无效</a:t>
+            </a:r>
+          </a:p>
+          <a:p>
+            <a:pPr>
+              <a:spcAft>
+                <a:spcPts val="200"/>
+              </a:spcAft>
+              <a:defRPr sz="1500">
+                <a:solidFill>
+                  <a:srgbClr val="2D2D3F"/>
+                </a:solidFill>
+              </a:defRPr>
+            </a:pPr>
+            <a:r>
+              <a:t>     → 删除，无效</a:t>
+            </a:r>
+          </a:p>
+          <a:p>
+            <a:pPr>
+              <a:spcAft>
+                <a:spcPts val="200"/>
+              </a:spcAft>
+              <a:defRPr sz="1500">
+                <a:solidFill>
+                  <a:srgbClr val="2D2D3F"/>
+                </a:solidFill>
+              </a:defRPr>
+            </a:pPr>
+            <a:r>
+              <a:t>     → 放标记，无效</a:t>
+            </a:r>
+          </a:p>
+          <a:p>
+            <a:pPr>
+              <a:spcAft>
+                <a:spcPts val="200"/>
+              </a:spcAft>
+              <a:defRPr sz="1500">
+                <a:solidFill>
+                  <a:srgbClr val="2D2D3F"/>
+                </a:solidFill>
+              </a:defRPr>
+            </a:pPr>
+            <a:r>
+              <a:t>     最后逐行跟踪 ListProjectTree()</a:t>
+            </a:r>
+          </a:p>
+          <a:p>
+            <a:pPr>
+              <a:spcAft>
+                <a:spcPts val="200"/>
+              </a:spcAft>
+              <a:defRPr sz="1500">
+                <a:solidFill>
+                  <a:srgbClr val="2D2D3F"/>
+                </a:solidFill>
+              </a:defRPr>
+            </a:pPr>
+            <a:r>
+              <a:t>     → 发现 orderedTopicIDs 的 titleMap 循环</a:t>
+            </a:r>
+          </a:p>
+        </p:txBody>
+      </p:sp>
+      <p:sp>
+        <p:nvSpPr>
+          <p:cNvPr id="7" name="TextBox 6"/>
+          <p:cNvSpPr txBox="1"/>
+          <p:nvPr/>
+        </p:nvSpPr>
+        <p:spPr>
+          <a:xfrm>
+            <a:off x="457200" y="6400800"/>
+            <a:ext cx="11247120" cy="365760"/>
+          </a:xfrm>
+          <a:prstGeom prst="rect">
+            <a:avLst/>
+          </a:prstGeom>
+          <a:noFill/>
+        </p:spPr>
+        <p:txBody>
+          <a:bodyPr wrap="none">
+            <a:spAutoFit/>
+          </a:bodyPr>
+          <a:lstStyle/>
+          <a:p>
+            <a:pPr algn="r">
+              <a:defRPr sz="1000">
+                <a:solidFill>
+                  <a:srgbClr val="999999"/>
+                </a:solidFill>
+              </a:defRPr>
+            </a:pPr>
+            <a:r>
+              <a:t>Reasonix Migration Assistant  |  github.com/CS-Faith/reasonix-migration-assistant</a:t>
             </a:r>
           </a:p>
         </p:txBody>
@@ -4601,7 +6918,7 @@
     <p:bg>
       <p:bgPr>
         <a:solidFill>
-          <a:srgbClr val="F5F0FA"/>
+          <a:srgbClr val="F7F8FC"/>
         </a:solidFill>
         <a:effectLst/>
       </p:bgPr>
@@ -4615,14 +6932,66 @@
       <p:grpSpPr/>
       <p:sp>
         <p:nvSpPr>
-          <p:cNvPr id="2" name="TextBox 1"/>
+          <p:cNvPr id="2" name="Rectangle 1"/>
+          <p:cNvSpPr/>
+          <p:nvPr/>
+        </p:nvSpPr>
+        <p:spPr>
+          <a:xfrm>
+            <a:off x="0" y="0"/>
+            <a:ext cx="12188952" cy="1005840"/>
+          </a:xfrm>
+          <a:prstGeom prst="rect">
+            <a:avLst/>
+          </a:prstGeom>
+          <a:solidFill>
+            <a:srgbClr val="1A1A2E"/>
+          </a:solidFill>
+          <a:ln>
+            <a:noFill/>
+          </a:ln>
+        </p:spPr>
+        <p:style>
+          <a:lnRef idx="1">
+            <a:schemeClr val="accent1"/>
+          </a:lnRef>
+          <a:fillRef idx="3">
+            <a:schemeClr val="accent1"/>
+          </a:fillRef>
+          <a:effectRef idx="2">
+            <a:schemeClr val="accent1"/>
+          </a:effectRef>
+          <a:fontRef idx="minor">
+            <a:schemeClr val="lt1"/>
+          </a:fontRef>
+        </p:style>
+        <p:txBody>
+          <a:bodyPr rtlCol="0" anchor="ctr" wrap="square"/>
+          <a:lstStyle/>
+          <a:p>
+            <a:pPr algn="l">
+              <a:defRPr sz="3200" b="1">
+                <a:solidFill>
+                  <a:srgbClr val="FFFFFF"/>
+                </a:solidFill>
+              </a:defRPr>
+            </a:pPr>
+            <a:r>
+              <a:t>  技术细节 ④：MCP — 从 JSON 到 TOML</a:t>
+            </a:r>
+          </a:p>
+        </p:txBody>
+      </p:sp>
+      <p:sp>
+        <p:nvSpPr>
+          <p:cNvPr id="3" name="TextBox 2"/>
           <p:cNvSpPr txBox="1"/>
           <p:nvPr/>
         </p:nvSpPr>
         <p:spPr>
           <a:xfrm>
-            <a:off x="731520" y="457200"/>
-            <a:ext cx="10698480" cy="1097280"/>
+            <a:off x="457200" y="1280160"/>
+            <a:ext cx="5760720" cy="5486400"/>
           </a:xfrm>
           <a:prstGeom prst="rect">
             <a:avLst/>
@@ -4636,28 +7005,199 @@
           <a:lstStyle/>
           <a:p>
             <a:pPr>
-              <a:defRPr sz="3600" b="1">
-                <a:solidFill>
-                  <a:srgbClr val="1A1A2E"/>
-                </a:solidFill>
-              </a:defRPr>
-            </a:pPr>
-            <a:r>
-              <a:t>使用方法 — 场景二：便携版升级</a:t>
-            </a:r>
-          </a:p>
-        </p:txBody>
-      </p:sp>
-      <p:sp>
-        <p:nvSpPr>
-          <p:cNvPr id="3" name="TextBox 2"/>
+              <a:defRPr sz="1800" b="1">
+                <a:solidFill>
+                  <a:srgbClr val="999999"/>
+                </a:solidFill>
+              </a:defRPr>
+            </a:pPr>
+            <a:r>
+              <a:t>老版 — config.json (JSON)</a:t>
+            </a:r>
+          </a:p>
+          <a:p>
+            <a:pPr>
+              <a:spcAft>
+                <a:spcPts val="1200"/>
+              </a:spcAft>
+            </a:pPr>
+          </a:p>
+          <a:p>
+            <a:pPr>
+              <a:defRPr sz="1800" b="1">
+                <a:solidFill>
+                  <a:srgbClr val="66BB6A"/>
+                </a:solidFill>
+              </a:defRPr>
+            </a:pPr>
+            <a:r>
+              <a:t>新版 — config.toml (TOML)</a:t>
+            </a:r>
+          </a:p>
+        </p:txBody>
+      </p:sp>
+      <p:sp>
+        <p:nvSpPr>
+          <p:cNvPr id="4" name="Rectangle 3"/>
+          <p:cNvSpPr/>
+          <p:nvPr/>
+        </p:nvSpPr>
+        <p:spPr>
+          <a:xfrm>
+            <a:off x="457200" y="1828800"/>
+            <a:ext cx="5760720" cy="1828800"/>
+          </a:xfrm>
+          <a:prstGeom prst="rect">
+            <a:avLst/>
+          </a:prstGeom>
+          <a:solidFill>
+            <a:srgbClr val="1E2A3A"/>
+          </a:solidFill>
+          <a:ln>
+            <a:noFill/>
+          </a:ln>
+        </p:spPr>
+        <p:style>
+          <a:lnRef idx="1">
+            <a:schemeClr val="accent1"/>
+          </a:lnRef>
+          <a:fillRef idx="3">
+            <a:schemeClr val="accent1"/>
+          </a:fillRef>
+          <a:effectRef idx="2">
+            <a:schemeClr val="accent1"/>
+          </a:effectRef>
+          <a:fontRef idx="minor">
+            <a:schemeClr val="lt1"/>
+          </a:fontRef>
+        </p:style>
+        <p:txBody>
+          <a:bodyPr rtlCol="0" anchor="ctr" wrap="square"/>
+          <a:lstStyle/>
+          <a:p>
+            <a:pPr algn="ctr">
+              <a:spcAft>
+                <a:spcPts val="0"/>
+              </a:spcAft>
+              <a:defRPr sz="1300">
+                <a:solidFill>
+                  <a:srgbClr val="A5D6FF"/>
+                </a:solidFill>
+                <a:latin typeface="Consolas"/>
+              </a:defRPr>
+            </a:pPr>
+            <a:r>
+              <a:t>{</a:t>
+            </a:r>
+            <a:br/>
+            <a:r>
+              <a:t>  "mcp": {</a:t>
+            </a:r>
+            <a:br/>
+            <a:r>
+              <a:t>    "image-analyzer": {</a:t>
+            </a:r>
+            <a:br/>
+            <a:r>
+              <a:t>      "command": "C:/path/python.exe",</a:t>
+            </a:r>
+            <a:br/>
+            <a:r>
+              <a:t>      "args": ["C:/path/server.py"]</a:t>
+            </a:r>
+            <a:br/>
+            <a:r>
+              <a:t>    }</a:t>
+            </a:r>
+            <a:br/>
+            <a:r>
+              <a:t>  }</a:t>
+            </a:r>
+            <a:br/>
+            <a:r>
+              <a:t>}</a:t>
+            </a:r>
+          </a:p>
+        </p:txBody>
+      </p:sp>
+      <p:sp>
+        <p:nvSpPr>
+          <p:cNvPr id="5" name="Rectangle 4"/>
+          <p:cNvSpPr/>
+          <p:nvPr/>
+        </p:nvSpPr>
+        <p:spPr>
+          <a:xfrm>
+            <a:off x="457200" y="3931920"/>
+            <a:ext cx="5760720" cy="1828800"/>
+          </a:xfrm>
+          <a:prstGeom prst="rect">
+            <a:avLst/>
+          </a:prstGeom>
+          <a:solidFill>
+            <a:srgbClr val="1E2A3A"/>
+          </a:solidFill>
+          <a:ln>
+            <a:noFill/>
+          </a:ln>
+        </p:spPr>
+        <p:style>
+          <a:lnRef idx="1">
+            <a:schemeClr val="accent1"/>
+          </a:lnRef>
+          <a:fillRef idx="3">
+            <a:schemeClr val="accent1"/>
+          </a:fillRef>
+          <a:effectRef idx="2">
+            <a:schemeClr val="accent1"/>
+          </a:effectRef>
+          <a:fontRef idx="minor">
+            <a:schemeClr val="lt1"/>
+          </a:fontRef>
+        </p:style>
+        <p:txBody>
+          <a:bodyPr rtlCol="0" anchor="ctr" wrap="square"/>
+          <a:lstStyle/>
+          <a:p>
+            <a:pPr algn="ctr">
+              <a:spcAft>
+                <a:spcPts val="0"/>
+              </a:spcAft>
+              <a:defRPr sz="1300">
+                <a:solidFill>
+                  <a:srgbClr val="A5D6FF"/>
+                </a:solidFill>
+                <a:latin typeface="Consolas"/>
+              </a:defRPr>
+            </a:pPr>
+            <a:r>
+              <a:t>[[plugins]]</a:t>
+            </a:r>
+            <a:br/>
+            <a:r>
+              <a:t>name = "image-analyzer"</a:t>
+            </a:r>
+            <a:br/>
+            <a:r>
+              <a:t>command = 'C:/path/python.exe'</a:t>
+            </a:r>
+            <a:br/>
+            <a:r>
+              <a:t>args = ['C:/path/server.py']</a:t>
+            </a:r>
+          </a:p>
+        </p:txBody>
+      </p:sp>
+      <p:sp>
+        <p:nvSpPr>
+          <p:cNvPr id="6" name="TextBox 5"/>
           <p:cNvSpPr txBox="1"/>
           <p:nvPr/>
         </p:nvSpPr>
         <p:spPr>
           <a:xfrm>
-            <a:off x="1097280" y="1828800"/>
-            <a:ext cx="9966960" cy="4572000"/>
+            <a:off x="6858000" y="1280160"/>
+            <a:ext cx="5029200" cy="5303520"/>
           </a:xfrm>
           <a:prstGeom prst="rect">
             <a:avLst/>
@@ -4669,178 +7209,187 @@
             <a:spAutoFit/>
           </a:bodyPr>
           <a:lstStyle/>
-          <a:p>
-            <a:pPr>
-              <a:spcAft>
-                <a:spcPts val="800"/>
-              </a:spcAft>
-              <a:defRPr sz="2200">
-                <a:solidFill>
-                  <a:srgbClr val="333333"/>
-                </a:solidFill>
-              </a:defRPr>
-            </a:pPr>
-            <a:r>
-              <a:t>▎ 适用：U 盘 / 同步盘便携版 0.53</a:t>
-            </a:r>
-          </a:p>
-          <a:p>
-            <a:pPr>
-              <a:spcAft>
-                <a:spcPts val="800"/>
-              </a:spcAft>
-              <a:defRPr sz="2200">
-                <a:solidFill>
-                  <a:srgbClr val="333333"/>
-                </a:solidFill>
-              </a:defRPr>
-            </a:pPr>
-          </a:p>
-          <a:p>
-            <a:pPr>
-              <a:spcAft>
-                <a:spcPts val="800"/>
-              </a:spcAft>
-              <a:defRPr sz="2200">
-                <a:solidFill>
-                  <a:srgbClr val="333333"/>
-                </a:solidFill>
-              </a:defRPr>
-            </a:pPr>
-            <a:r>
-              <a:t>▎ 步骤：</a:t>
-            </a:r>
-          </a:p>
-          <a:p>
-            <a:pPr>
-              <a:spcAft>
-                <a:spcPts val="800"/>
-              </a:spcAft>
-              <a:defRPr sz="2200">
-                <a:solidFill>
-                  <a:srgbClr val="333333"/>
-                </a:solidFill>
-              </a:defRPr>
-            </a:pPr>
-            <a:r>
-              <a:t>  1. 把 bat + ps1 两个文件复制到便携版 Reasonix 根目录</a:t>
-            </a:r>
-          </a:p>
-          <a:p>
-            <a:pPr>
-              <a:spcAft>
-                <a:spcPts val="800"/>
-              </a:spcAft>
-              <a:defRPr sz="2200">
-                <a:solidFill>
-                  <a:srgbClr val="333333"/>
-                </a:solidFill>
-              </a:defRPr>
-            </a:pPr>
-            <a:r>
-              <a:t>  2. 在便携版目录内双击 bat</a:t>
-            </a:r>
-          </a:p>
-          <a:p>
-            <a:pPr>
-              <a:spcAft>
-                <a:spcPts val="800"/>
-              </a:spcAft>
-              <a:defRPr sz="2200">
-                <a:solidFill>
-                  <a:srgbClr val="333333"/>
-                </a:solidFill>
-              </a:defRPr>
-            </a:pPr>
-            <a:r>
-              <a:t>  3. 选择 [2] 便携版升级</a:t>
-            </a:r>
-          </a:p>
-          <a:p>
-            <a:pPr>
-              <a:spcAft>
-                <a:spcPts val="800"/>
-              </a:spcAft>
-              <a:defRPr sz="2200">
-                <a:solidFill>
-                  <a:srgbClr val="333333"/>
-                </a:solidFill>
-              </a:defRPr>
-            </a:pPr>
-            <a:r>
-              <a:t>  4. 工具自动读取当前目录的 .reasonix 数据</a:t>
-            </a:r>
-          </a:p>
-          <a:p>
-            <a:pPr>
-              <a:spcAft>
-                <a:spcPts val="800"/>
-              </a:spcAft>
-              <a:defRPr sz="2200">
-                <a:solidFill>
-                  <a:srgbClr val="333333"/>
-                </a:solidFill>
-              </a:defRPr>
-            </a:pPr>
-            <a:r>
-              <a:t>  5. 启动新版 Reasonix → 点击「历史对话」查看</a:t>
-            </a:r>
-          </a:p>
-          <a:p>
-            <a:pPr>
-              <a:spcAft>
-                <a:spcPts val="800"/>
-              </a:spcAft>
-              <a:defRPr sz="2200">
-                <a:solidFill>
-                  <a:srgbClr val="333333"/>
-                </a:solidFill>
-              </a:defRPr>
-            </a:pPr>
-          </a:p>
-          <a:p>
-            <a:pPr>
-              <a:spcAft>
-                <a:spcPts val="800"/>
-              </a:spcAft>
-              <a:defRPr sz="2200">
-                <a:solidFill>
-                  <a:srgbClr val="333333"/>
-                </a:solidFill>
-              </a:defRPr>
-            </a:pPr>
-            <a:r>
-              <a:t>▎ 注意：</a:t>
-            </a:r>
-          </a:p>
-          <a:p>
-            <a:pPr>
-              <a:spcAft>
-                <a:spcPts val="800"/>
-              </a:spcAft>
-              <a:defRPr sz="2200">
-                <a:solidFill>
-                  <a:srgbClr val="333333"/>
-                </a:solidFill>
-              </a:defRPr>
-            </a:pPr>
-            <a:r>
-              <a:t>  ⚠ bat 文件必须放在便携版根目录下运行</a:t>
-            </a:r>
-          </a:p>
-          <a:p>
-            <a:pPr>
-              <a:spcAft>
-                <a:spcPts val="800"/>
-              </a:spcAft>
-              <a:defRPr sz="2200">
-                <a:solidFill>
-                  <a:srgbClr val="333333"/>
-                </a:solidFill>
-              </a:defRPr>
-            </a:pPr>
-            <a:r>
-              <a:t>  ⚠ 不要在 C 盘迁移工具目录下选 [2]</a:t>
+          <a:p/>
+          <a:p>
+            <a:pPr>
+              <a:spcAft>
+                <a:spcPts val="400"/>
+              </a:spcAft>
+            </a:pPr>
+          </a:p>
+          <a:p>
+            <a:pPr>
+              <a:defRPr sz="2000" b="1">
+                <a:solidFill>
+                  <a:srgbClr val="4FC3F7"/>
+                </a:solidFill>
+              </a:defRPr>
+            </a:pPr>
+            <a:r>
+              <a:t>⚠  Windows 路径用单引号</a:t>
+            </a:r>
+          </a:p>
+          <a:p>
+            <a:pPr>
+              <a:spcAft>
+                <a:spcPts val="200"/>
+              </a:spcAft>
+              <a:defRPr sz="1700">
+                <a:solidFill>
+                  <a:srgbClr val="2D2D3F"/>
+                </a:solidFill>
+              </a:defRPr>
+            </a:pPr>
+            <a:r>
+              <a:t>     双引号 → TOML 把 "\" 当转义 → 路径损坏</a:t>
+            </a:r>
+          </a:p>
+          <a:p>
+            <a:pPr>
+              <a:spcAft>
+                <a:spcPts val="200"/>
+              </a:spcAft>
+              <a:defRPr sz="1700">
+                <a:solidFill>
+                  <a:srgbClr val="2D2D3F"/>
+                </a:solidFill>
+              </a:defRPr>
+            </a:pPr>
+            <a:r>
+              <a:t>     单引号 → 原样保留 → 正确</a:t>
+            </a:r>
+          </a:p>
+          <a:p>
+            <a:pPr>
+              <a:spcAft>
+                <a:spcPts val="400"/>
+              </a:spcAft>
+            </a:pPr>
+          </a:p>
+          <a:p>
+            <a:pPr>
+              <a:defRPr sz="2000" b="1">
+                <a:solidFill>
+                  <a:srgbClr val="4FC3F7"/>
+                </a:solidFill>
+              </a:defRPr>
+            </a:pPr>
+            <a:r>
+              <a:t>🔄  避免重复添加</a:t>
+            </a:r>
+          </a:p>
+          <a:p>
+            <a:pPr>
+              <a:spcAft>
+                <a:spcPts val="200"/>
+              </a:spcAft>
+              <a:defRPr sz="1700">
+                <a:solidFill>
+                  <a:srgbClr val="2D2D3F"/>
+                </a:solidFill>
+              </a:defRPr>
+            </a:pPr>
+            <a:r>
+              <a:t>     检查 config.toml 是否已有 [[plugins]]</a:t>
+            </a:r>
+          </a:p>
+          <a:p>
+            <a:pPr>
+              <a:spcAft>
+                <a:spcPts val="200"/>
+              </a:spcAft>
+              <a:defRPr sz="1700">
+                <a:solidFill>
+                  <a:srgbClr val="2D2D3F"/>
+                </a:solidFill>
+              </a:defRPr>
+            </a:pPr>
+            <a:r>
+              <a:t>     已有 → 跳过；没有 → 追加</a:t>
+            </a:r>
+          </a:p>
+          <a:p>
+            <a:pPr>
+              <a:spcAft>
+                <a:spcPts val="400"/>
+              </a:spcAft>
+            </a:pPr>
+          </a:p>
+          <a:p>
+            <a:pPr>
+              <a:defRPr sz="2000" b="1">
+                <a:solidFill>
+                  <a:srgbClr val="4FC3F7"/>
+                </a:solidFill>
+              </a:defRPr>
+            </a:pPr>
+            <a:r>
+              <a:t>📋  支持两种老版格式</a:t>
+            </a:r>
+          </a:p>
+          <a:p>
+            <a:pPr>
+              <a:spcAft>
+                <a:spcPts val="200"/>
+              </a:spcAft>
+              <a:defRPr sz="1700">
+                <a:solidFill>
+                  <a:srgbClr val="2D2D3F"/>
+                </a:solidFill>
+              </a:defRPr>
+            </a:pPr>
+            <a:r>
+              <a:t>     数组格式: ["name=cmd args"]</a:t>
+            </a:r>
+          </a:p>
+          <a:p>
+            <a:pPr>
+              <a:spcAft>
+                <a:spcPts val="200"/>
+              </a:spcAft>
+              <a:defRPr sz="1700">
+                <a:solidFill>
+                  <a:srgbClr val="2D2D3F"/>
+                </a:solidFill>
+              </a:defRPr>
+            </a:pPr>
+            <a:r>
+              <a:t>     对象格式: {"name": {command, args}}</a:t>
+            </a:r>
+          </a:p>
+        </p:txBody>
+      </p:sp>
+      <p:sp>
+        <p:nvSpPr>
+          <p:cNvPr id="7" name="TextBox 6"/>
+          <p:cNvSpPr txBox="1"/>
+          <p:nvPr/>
+        </p:nvSpPr>
+        <p:spPr>
+          <a:xfrm>
+            <a:off x="457200" y="6400800"/>
+            <a:ext cx="11247120" cy="365760"/>
+          </a:xfrm>
+          <a:prstGeom prst="rect">
+            <a:avLst/>
+          </a:prstGeom>
+          <a:noFill/>
+        </p:spPr>
+        <p:txBody>
+          <a:bodyPr wrap="none">
+            <a:spAutoFit/>
+          </a:bodyPr>
+          <a:lstStyle/>
+          <a:p>
+            <a:pPr algn="r">
+              <a:defRPr sz="1000">
+                <a:solidFill>
+                  <a:srgbClr val="999999"/>
+                </a:solidFill>
+              </a:defRPr>
+            </a:pPr>
+            <a:r>
+              <a:t>Reasonix Migration Assistant  |  github.com/CS-Faith/reasonix-migration-assistant</a:t>
             </a:r>
           </a:p>
         </p:txBody>
@@ -4859,7 +7408,7 @@
     <p:bg>
       <p:bgPr>
         <a:solidFill>
-          <a:srgbClr val="F0F5F0"/>
+          <a:srgbClr val="F7F8FC"/>
         </a:solidFill>
         <a:effectLst/>
       </p:bgPr>
@@ -4873,14 +7422,66 @@
       <p:grpSpPr/>
       <p:sp>
         <p:nvSpPr>
-          <p:cNvPr id="2" name="TextBox 1"/>
+          <p:cNvPr id="2" name="Rectangle 1"/>
+          <p:cNvSpPr/>
+          <p:nvPr/>
+        </p:nvSpPr>
+        <p:spPr>
+          <a:xfrm>
+            <a:off x="0" y="0"/>
+            <a:ext cx="12188952" cy="1005840"/>
+          </a:xfrm>
+          <a:prstGeom prst="rect">
+            <a:avLst/>
+          </a:prstGeom>
+          <a:solidFill>
+            <a:srgbClr val="1A1A2E"/>
+          </a:solidFill>
+          <a:ln>
+            <a:noFill/>
+          </a:ln>
+        </p:spPr>
+        <p:style>
+          <a:lnRef idx="1">
+            <a:schemeClr val="accent1"/>
+          </a:lnRef>
+          <a:fillRef idx="3">
+            <a:schemeClr val="accent1"/>
+          </a:fillRef>
+          <a:effectRef idx="2">
+            <a:schemeClr val="accent1"/>
+          </a:effectRef>
+          <a:fontRef idx="minor">
+            <a:schemeClr val="lt1"/>
+          </a:fontRef>
+        </p:style>
+        <p:txBody>
+          <a:bodyPr rtlCol="0" anchor="ctr" wrap="square"/>
+          <a:lstStyle/>
+          <a:p>
+            <a:pPr algn="l">
+              <a:defRPr sz="3200" b="1">
+                <a:solidFill>
+                  <a:srgbClr val="FFFFFF"/>
+                </a:solidFill>
+              </a:defRPr>
+            </a:pPr>
+            <a:r>
+              <a:t>  架构设计：一次检测，四步共享</a:t>
+            </a:r>
+          </a:p>
+        </p:txBody>
+      </p:sp>
+      <p:sp>
+        <p:nvSpPr>
+          <p:cNvPr id="3" name="TextBox 2"/>
           <p:cNvSpPr txBox="1"/>
           <p:nvPr/>
         </p:nvSpPr>
         <p:spPr>
           <a:xfrm>
-            <a:off x="731520" y="457200"/>
-            <a:ext cx="10698480" cy="1097280"/>
+            <a:off x="457200" y="1188720"/>
+            <a:ext cx="11247120" cy="5486400"/>
           </a:xfrm>
           <a:prstGeom prst="rect">
             <a:avLst/>
@@ -4894,28 +7495,116 @@
           <a:lstStyle/>
           <a:p>
             <a:pPr>
-              <a:defRPr sz="3600" b="1">
-                <a:solidFill>
-                  <a:srgbClr val="1A1A2E"/>
-                </a:solidFill>
-              </a:defRPr>
-            </a:pPr>
-            <a:r>
-              <a:t>安全保障</a:t>
-            </a:r>
-          </a:p>
-        </p:txBody>
-      </p:sp>
-      <p:sp>
-        <p:nvSpPr>
-          <p:cNvPr id="3" name="TextBox 2"/>
+              <a:defRPr sz="2200" b="1">
+                <a:solidFill>
+                  <a:srgbClr val="7C4DFF"/>
+                </a:solidFill>
+              </a:defRPr>
+            </a:pPr>
+            <a:r>
+              <a:t>核心脚本 — 346 行 PowerShell</a:t>
+            </a:r>
+          </a:p>
+        </p:txBody>
+      </p:sp>
+      <p:sp>
+        <p:nvSpPr>
+          <p:cNvPr id="4" name="Rectangle 3"/>
+          <p:cNvSpPr/>
+          <p:nvPr/>
+        </p:nvSpPr>
+        <p:spPr>
+          <a:xfrm>
+            <a:off x="457200" y="1737360"/>
+            <a:ext cx="11247120" cy="1463040"/>
+          </a:xfrm>
+          <a:prstGeom prst="rect">
+            <a:avLst/>
+          </a:prstGeom>
+          <a:solidFill>
+            <a:srgbClr val="1E2A3A"/>
+          </a:solidFill>
+          <a:ln>
+            <a:noFill/>
+          </a:ln>
+        </p:spPr>
+        <p:style>
+          <a:lnRef idx="1">
+            <a:schemeClr val="accent1"/>
+          </a:lnRef>
+          <a:fillRef idx="3">
+            <a:schemeClr val="accent1"/>
+          </a:fillRef>
+          <a:effectRef idx="2">
+            <a:schemeClr val="accent1"/>
+          </a:effectRef>
+          <a:fontRef idx="minor">
+            <a:schemeClr val="lt1"/>
+          </a:fontRef>
+        </p:style>
+        <p:txBody>
+          <a:bodyPr rtlCol="0" anchor="ctr" wrap="square"/>
+          <a:lstStyle/>
+          <a:p>
+            <a:pPr algn="ctr">
+              <a:spcAft>
+                <a:spcPts val="0"/>
+              </a:spcAft>
+              <a:defRPr sz="1300">
+                <a:solidFill>
+                  <a:srgbClr val="A5D6FF"/>
+                </a:solidFill>
+                <a:latin typeface="Consolas"/>
+              </a:defRPr>
+            </a:pPr>
+            <a:r>
+              <a:t>Migrate-053to1X.ps1</a:t>
+            </a:r>
+            <a:br/>
+            <a:r>
+              <a:t>  ├── 源检测  ─┬─ [1] C盘扫描  ────→  $srcRoot</a:t>
+            </a:r>
+            <a:br/>
+            <a:r>
+              <a:t>  │            └─ [2] 脚本目录定位 ─→  $srcRoot</a:t>
+            </a:r>
+            <a:br/>
+            <a:r>
+              <a:t>  │</a:t>
+            </a:r>
+            <a:br/>
+            <a:r>
+              <a:t>  ├── [1/4] MCP迁移       config.json → config.toml  [[plugins]]</a:t>
+            </a:r>
+            <a:br/>
+            <a:r>
+              <a:t>  ├── [2/4] 会话迁移      重命名 + meta + telemetry + ckpt  四件套</a:t>
+            </a:r>
+            <a:br/>
+            <a:r>
+              <a:t>  ├── [3/4] 记忆迁移      memory/ → projects/&lt;slug&gt;/memory/ + MEMORY.md</a:t>
+            </a:r>
+            <a:br/>
+            <a:r>
+              <a:t>  └── [4/4] 历史发现      独立topic_id + 清标题文件 + 放迁移标记</a:t>
+            </a:r>
+            <a:br/>
+            <a:r>
+              <a:t>                         → 侧边栏干净，历史列表全量，打开即对话</a:t>
+            </a:r>
+          </a:p>
+        </p:txBody>
+      </p:sp>
+      <p:sp>
+        <p:nvSpPr>
+          <p:cNvPr id="5" name="TextBox 4"/>
           <p:cNvSpPr txBox="1"/>
           <p:nvPr/>
         </p:nvSpPr>
         <p:spPr>
           <a:xfrm>
-            <a:off x="1097280" y="1828800"/>
-            <a:ext cx="9966960" cy="4572000"/>
+            <a:off x="457200" y="3566160"/>
+            <a:ext cx="5303520" cy="2286000"/>
           </a:xfrm>
           <a:prstGeom prst="rect">
             <a:avLst/>
@@ -4927,217 +7616,207 @@
             <a:spAutoFit/>
           </a:bodyPr>
           <a:lstStyle/>
-          <a:p>
-            <a:pPr>
-              <a:spcAft>
-                <a:spcPts val="800"/>
-              </a:spcAft>
-              <a:defRPr sz="2200">
-                <a:solidFill>
-                  <a:srgbClr val="333333"/>
-                </a:solidFill>
-              </a:defRPr>
-            </a:pPr>
-            <a:r>
-              <a:t>▎ 迁移前自动备份</a:t>
-            </a:r>
-          </a:p>
-          <a:p>
-            <a:pPr>
-              <a:spcAft>
-                <a:spcPts val="800"/>
-              </a:spcAft>
-              <a:defRPr sz="2200">
-                <a:solidFill>
-                  <a:srgbClr val="333333"/>
-                </a:solidFill>
-              </a:defRPr>
-            </a:pPr>
-            <a:r>
-              <a:t>  • 新版 %APPDATA%\reasonix\ 自动备份到 reasonix.backup-&lt;时间戳&gt;\</a:t>
-            </a:r>
-          </a:p>
-          <a:p>
-            <a:pPr>
-              <a:spcAft>
-                <a:spcPts val="800"/>
-              </a:spcAft>
-              <a:defRPr sz="2200">
-                <a:solidFill>
-                  <a:srgbClr val="333333"/>
-                </a:solidFill>
-              </a:defRPr>
-            </a:pPr>
-          </a:p>
-          <a:p>
-            <a:pPr>
-              <a:spcAft>
-                <a:spcPts val="800"/>
-              </a:spcAft>
-              <a:defRPr sz="2200">
-                <a:solidFill>
-                  <a:srgbClr val="333333"/>
-                </a:solidFill>
-              </a:defRPr>
-            </a:pPr>
-            <a:r>
-              <a:t>▎ 幂等性</a:t>
-            </a:r>
-          </a:p>
-          <a:p>
-            <a:pPr>
-              <a:spcAft>
-                <a:spcPts val="800"/>
-              </a:spcAft>
-              <a:defRPr sz="2200">
-                <a:solidFill>
-                  <a:srgbClr val="333333"/>
-                </a:solidFill>
-              </a:defRPr>
-            </a:pPr>
-            <a:r>
-              <a:t>  • 重复运行不会重复迁移，已存在的文件自动跳过</a:t>
-            </a:r>
-          </a:p>
-          <a:p>
-            <a:pPr>
-              <a:spcAft>
-                <a:spcPts val="800"/>
-              </a:spcAft>
-              <a:defRPr sz="2200">
-                <a:solidFill>
-                  <a:srgbClr val="333333"/>
-                </a:solidFill>
-              </a:defRPr>
-            </a:pPr>
-          </a:p>
-          <a:p>
-            <a:pPr>
-              <a:spcAft>
-                <a:spcPts val="800"/>
-              </a:spcAft>
-              <a:defRPr sz="2200">
-                <a:solidFill>
-                  <a:srgbClr val="333333"/>
-                </a:solidFill>
-              </a:defRPr>
-            </a:pPr>
-            <a:r>
-              <a:t>▎ 纯本地操作</a:t>
-            </a:r>
-          </a:p>
-          <a:p>
-            <a:pPr>
-              <a:spcAft>
-                <a:spcPts val="800"/>
-              </a:spcAft>
-              <a:defRPr sz="2200">
-                <a:solidFill>
-                  <a:srgbClr val="333333"/>
-                </a:solidFill>
-              </a:defRPr>
-            </a:pPr>
-            <a:r>
-              <a:t>  • 不联网，不上传数据，所有操作在本地完成</a:t>
-            </a:r>
-          </a:p>
-          <a:p>
-            <a:pPr>
-              <a:spcAft>
-                <a:spcPts val="800"/>
-              </a:spcAft>
-              <a:defRPr sz="2200">
-                <a:solidFill>
-                  <a:srgbClr val="333333"/>
-                </a:solidFill>
-              </a:defRPr>
-            </a:pPr>
-          </a:p>
-          <a:p>
-            <a:pPr>
-              <a:spcAft>
-                <a:spcPts val="800"/>
-              </a:spcAft>
-              <a:defRPr sz="2200">
-                <a:solidFill>
-                  <a:srgbClr val="333333"/>
-                </a:solidFill>
-              </a:defRPr>
-            </a:pPr>
-            <a:r>
-              <a:t>▎ 预览模式</a:t>
-            </a:r>
-          </a:p>
-          <a:p>
-            <a:pPr>
-              <a:spcAft>
-                <a:spcPts val="800"/>
-              </a:spcAft>
-              <a:defRPr sz="2200">
-                <a:solidFill>
-                  <a:srgbClr val="333333"/>
-                </a:solidFill>
-              </a:defRPr>
-            </a:pPr>
-            <a:r>
-              <a:t>  • 选 [3] 预览，只看不写，完全安全</a:t>
-            </a:r>
-          </a:p>
-          <a:p>
-            <a:pPr>
-              <a:spcAft>
-                <a:spcPts val="800"/>
-              </a:spcAft>
-              <a:defRPr sz="2200">
-                <a:solidFill>
-                  <a:srgbClr val="333333"/>
-                </a:solidFill>
-              </a:defRPr>
-            </a:pPr>
-          </a:p>
-          <a:p>
-            <a:pPr>
-              <a:spcAft>
-                <a:spcPts val="800"/>
-              </a:spcAft>
-              <a:defRPr sz="2200">
-                <a:solidFill>
-                  <a:srgbClr val="333333"/>
-                </a:solidFill>
-              </a:defRPr>
-            </a:pPr>
-            <a:r>
-              <a:t>▎ 无依赖</a:t>
-            </a:r>
-          </a:p>
-          <a:p>
-            <a:pPr>
-              <a:spcAft>
-                <a:spcPts val="800"/>
-              </a:spcAft>
-              <a:defRPr sz="2200">
-                <a:solidFill>
-                  <a:srgbClr val="333333"/>
-                </a:solidFill>
-              </a:defRPr>
-            </a:pPr>
-            <a:r>
-              <a:t>  • Windows PowerShell 5.1+ 即可，无需管理员权限</a:t>
-            </a:r>
-          </a:p>
-          <a:p>
-            <a:pPr>
-              <a:spcAft>
-                <a:spcPts val="800"/>
-              </a:spcAft>
-              <a:defRPr sz="2200">
-                <a:solidFill>
-                  <a:srgbClr val="333333"/>
-                </a:solidFill>
-              </a:defRPr>
-            </a:pPr>
-            <a:r>
-              <a:t>  • 不依赖任何第三方软件</a:t>
+          <a:p/>
+          <a:p>
+            <a:pPr>
+              <a:spcAft>
+                <a:spcPts val="400"/>
+              </a:spcAft>
+            </a:pPr>
+          </a:p>
+          <a:p>
+            <a:pPr>
+              <a:defRPr sz="1800" b="1">
+                <a:solidFill>
+                  <a:srgbClr val="4FC3F7"/>
+                </a:solidFill>
+              </a:defRPr>
+            </a:pPr>
+            <a:r>
+              <a:t>🔀  双场景共享后四步</a:t>
+            </a:r>
+          </a:p>
+          <a:p>
+            <a:pPr>
+              <a:spcAft>
+                <a:spcPts val="200"/>
+              </a:spcAft>
+              <a:defRPr sz="1500">
+                <a:solidFill>
+                  <a:srgbClr val="2D2D3F"/>
+                </a:solidFill>
+              </a:defRPr>
+            </a:pPr>
+            <a:r>
+              <a:t>     场景 [1] 标准升级：扫描 C:\Users\*\.reasonix\</a:t>
+            </a:r>
+          </a:p>
+          <a:p>
+            <a:pPr>
+              <a:spcAft>
+                <a:spcPts val="200"/>
+              </a:spcAft>
+              <a:defRPr sz="1500">
+                <a:solidFill>
+                  <a:srgbClr val="2D2D3F"/>
+                </a:solidFill>
+              </a:defRPr>
+            </a:pPr>
+            <a:r>
+              <a:t>     场景 [2] 便携升级：取脚本所在目录的 .reasonix\</a:t>
+            </a:r>
+          </a:p>
+          <a:p>
+            <a:pPr>
+              <a:spcAft>
+                <a:spcPts val="200"/>
+              </a:spcAft>
+              <a:defRPr sz="1500">
+                <a:solidFill>
+                  <a:srgbClr val="2D2D3F"/>
+                </a:solidFill>
+              </a:defRPr>
+            </a:pPr>
+            <a:r>
+              <a:t>     两者只在第一步分叉，后续逻辑完全统一</a:t>
+            </a:r>
+          </a:p>
+          <a:p>
+            <a:pPr>
+              <a:spcAft>
+                <a:spcPts val="200"/>
+              </a:spcAft>
+              <a:defRPr sz="1500">
+                <a:solidFill>
+                  <a:srgbClr val="2D2D3F"/>
+                </a:solidFill>
+              </a:defRPr>
+            </a:pPr>
+            <a:r>
+              <a:t>     维护一条代码，覆盖两种场景</a:t>
+            </a:r>
+          </a:p>
+        </p:txBody>
+      </p:sp>
+      <p:sp>
+        <p:nvSpPr>
+          <p:cNvPr id="6" name="TextBox 5"/>
+          <p:cNvSpPr txBox="1"/>
+          <p:nvPr/>
+        </p:nvSpPr>
+        <p:spPr>
+          <a:xfrm>
+            <a:off x="6400800" y="3566160"/>
+            <a:ext cx="5303520" cy="2286000"/>
+          </a:xfrm>
+          <a:prstGeom prst="rect">
+            <a:avLst/>
+          </a:prstGeom>
+          <a:noFill/>
+        </p:spPr>
+        <p:txBody>
+          <a:bodyPr wrap="square">
+            <a:spAutoFit/>
+          </a:bodyPr>
+          <a:lstStyle/>
+          <a:p/>
+          <a:p>
+            <a:pPr>
+              <a:spcAft>
+                <a:spcPts val="400"/>
+              </a:spcAft>
+            </a:pPr>
+          </a:p>
+          <a:p>
+            <a:pPr>
+              <a:defRPr sz="1800" b="1">
+                <a:solidFill>
+                  <a:srgbClr val="4FC3F7"/>
+                </a:solidFill>
+              </a:defRPr>
+            </a:pPr>
+            <a:r>
+              <a:t>⚡  编码安全措施</a:t>
+            </a:r>
+          </a:p>
+          <a:p>
+            <a:pPr>
+              <a:spcAft>
+                <a:spcPts val="200"/>
+              </a:spcAft>
+              <a:defRPr sz="1500">
+                <a:solidFill>
+                  <a:srgbClr val="2D2D3F"/>
+                </a:solidFill>
+              </a:defRPr>
+            </a:pPr>
+            <a:r>
+              <a:t>     全程 [IO.File]::WriteAllText  + 无 BOM 编码</a:t>
+            </a:r>
+          </a:p>
+          <a:p>
+            <a:pPr>
+              <a:spcAft>
+                <a:spcPts val="200"/>
+              </a:spcAft>
+              <a:defRPr sz="1500">
+                <a:solidFill>
+                  <a:srgbClr val="2D2D3F"/>
+                </a:solidFill>
+              </a:defRPr>
+            </a:pPr>
+            <a:r>
+              <a:t>     读取时检测 BOM: if ($txt[0] -eq 0xFEFF) { 跳过 }</a:t>
+            </a:r>
+          </a:p>
+          <a:p>
+            <a:pPr>
+              <a:spcAft>
+                <a:spcPts val="200"/>
+              </a:spcAft>
+              <a:defRPr sz="1500">
+                <a:solidFill>
+                  <a:srgbClr val="2D2D3F"/>
+                </a:solidFill>
+              </a:defRPr>
+            </a:pPr>
+            <a:r>
+              <a:t>     不再使用 Set-Content -Encoding UTF8</a:t>
+            </a:r>
+          </a:p>
+        </p:txBody>
+      </p:sp>
+      <p:sp>
+        <p:nvSpPr>
+          <p:cNvPr id="7" name="TextBox 6"/>
+          <p:cNvSpPr txBox="1"/>
+          <p:nvPr/>
+        </p:nvSpPr>
+        <p:spPr>
+          <a:xfrm>
+            <a:off x="457200" y="6400800"/>
+            <a:ext cx="11247120" cy="365760"/>
+          </a:xfrm>
+          <a:prstGeom prst="rect">
+            <a:avLst/>
+          </a:prstGeom>
+          <a:noFill/>
+        </p:spPr>
+        <p:txBody>
+          <a:bodyPr wrap="none">
+            <a:spAutoFit/>
+          </a:bodyPr>
+          <a:lstStyle/>
+          <a:p>
+            <a:pPr algn="r">
+              <a:defRPr sz="1000">
+                <a:solidFill>
+                  <a:srgbClr val="999999"/>
+                </a:solidFill>
+              </a:defRPr>
+            </a:pPr>
+            <a:r>
+              <a:t>Reasonix Migration Assistant  |  github.com/CS-Faith/reasonix-migration-assistant</a:t>
             </a:r>
           </a:p>
         </p:txBody>
@@ -5156,7 +7835,7 @@
     <p:bg>
       <p:bgPr>
         <a:solidFill>
-          <a:srgbClr val="1A1A2E"/>
+          <a:srgbClr val="F7F8FC"/>
         </a:solidFill>
         <a:effectLst/>
       </p:bgPr>
@@ -5170,14 +7849,66 @@
       <p:grpSpPr/>
       <p:sp>
         <p:nvSpPr>
-          <p:cNvPr id="2" name="TextBox 1"/>
+          <p:cNvPr id="2" name="Rectangle 1"/>
+          <p:cNvSpPr/>
+          <p:nvPr/>
+        </p:nvSpPr>
+        <p:spPr>
+          <a:xfrm>
+            <a:off x="0" y="0"/>
+            <a:ext cx="12188952" cy="1005840"/>
+          </a:xfrm>
+          <a:prstGeom prst="rect">
+            <a:avLst/>
+          </a:prstGeom>
+          <a:solidFill>
+            <a:srgbClr val="1A1A2E"/>
+          </a:solidFill>
+          <a:ln>
+            <a:noFill/>
+          </a:ln>
+        </p:spPr>
+        <p:style>
+          <a:lnRef idx="1">
+            <a:schemeClr val="accent1"/>
+          </a:lnRef>
+          <a:fillRef idx="3">
+            <a:schemeClr val="accent1"/>
+          </a:fillRef>
+          <a:effectRef idx="2">
+            <a:schemeClr val="accent1"/>
+          </a:effectRef>
+          <a:fontRef idx="minor">
+            <a:schemeClr val="lt1"/>
+          </a:fontRef>
+        </p:style>
+        <p:txBody>
+          <a:bodyPr rtlCol="0" anchor="ctr" wrap="square"/>
+          <a:lstStyle/>
+          <a:p>
+            <a:pPr algn="l">
+              <a:defRPr sz="3200" b="1">
+                <a:solidFill>
+                  <a:srgbClr val="FFFFFF"/>
+                </a:solidFill>
+              </a:defRPr>
+            </a:pPr>
+            <a:r>
+              <a:t>  使用方法 — 场景一：标准升级</a:t>
+            </a:r>
+          </a:p>
+        </p:txBody>
+      </p:sp>
+      <p:sp>
+        <p:nvSpPr>
+          <p:cNvPr id="3" name="TextBox 2"/>
           <p:cNvSpPr txBox="1"/>
           <p:nvPr/>
         </p:nvSpPr>
         <p:spPr>
           <a:xfrm>
-            <a:off x="914400" y="1371600"/>
-            <a:ext cx="10332720" cy="4572000"/>
+            <a:off x="731520" y="1280160"/>
+            <a:ext cx="10698480" cy="5029200"/>
           </a:xfrm>
           <a:prstGeom prst="rect">
             <a:avLst/>
@@ -5189,145 +7920,228 @@
             <a:spAutoFit/>
           </a:bodyPr>
           <a:lstStyle/>
-          <a:p>
-            <a:pPr algn="ctr">
-              <a:defRPr sz="4000" b="1">
-                <a:solidFill>
-                  <a:srgbClr val="FFFFFF"/>
-                </a:solidFill>
-              </a:defRPr>
-            </a:pPr>
-            <a:r>
-              <a:t>开源 &amp; 致谢</a:t>
-            </a:r>
-          </a:p>
-          <a:p>
-            <a:pPr algn="ctr">
+          <a:p/>
+          <a:p>
+            <a:pPr>
               <a:spcAft>
                 <a:spcPts val="400"/>
               </a:spcAft>
-              <a:defRPr sz="2000">
-                <a:solidFill>
-                  <a:srgbClr val="88AAFF"/>
-                </a:solidFill>
-              </a:defRPr>
-            </a:pPr>
-            <a:r>
-              <a:t>github.com/CS-Faith/reasonix-migration-assistant</a:t>
-            </a:r>
-          </a:p>
-          <a:p>
-            <a:pPr algn="ctr">
+            </a:pPr>
+          </a:p>
+          <a:p>
+            <a:pPr>
+              <a:defRPr sz="2200" b="1">
+                <a:solidFill>
+                  <a:srgbClr val="4FC3F7"/>
+                </a:solidFill>
+              </a:defRPr>
+            </a:pPr>
+            <a:r>
+              <a:t>🖥  适用：C 盘安装版 0.53 → 已装新版</a:t>
+            </a:r>
+          </a:p>
+          <a:p>
+            <a:pPr>
+              <a:spcAft>
+                <a:spcPts val="600"/>
+              </a:spcAft>
+            </a:pPr>
+          </a:p>
+          <a:p>
+            <a:pPr>
               <a:spcAft>
                 <a:spcPts val="400"/>
               </a:spcAft>
-              <a:defRPr sz="1200">
-                <a:solidFill>
-                  <a:srgbClr val="FFFFFF"/>
-                </a:solidFill>
-              </a:defRPr>
-            </a:pPr>
-          </a:p>
-          <a:p>
-            <a:pPr algn="ctr">
+            </a:pPr>
+          </a:p>
+          <a:p>
+            <a:pPr>
+              <a:defRPr sz="2000" b="1">
+                <a:solidFill>
+                  <a:srgbClr val="4FC3F7"/>
+                </a:solidFill>
+              </a:defRPr>
+            </a:pPr>
+            <a:r>
+              <a:t>1  确保新版 Reasonix 已安装并至少启动过一次</a:t>
+            </a:r>
+          </a:p>
+          <a:p>
+            <a:pPr>
               <a:spcAft>
                 <a:spcPts val="400"/>
               </a:spcAft>
+            </a:pPr>
+          </a:p>
+          <a:p>
+            <a:pPr>
+              <a:defRPr sz="2000" b="1">
+                <a:solidFill>
+                  <a:srgbClr val="4FC3F7"/>
+                </a:solidFill>
+              </a:defRPr>
+            </a:pPr>
+            <a:r>
+              <a:t>2  双击「0.53配置迁移到1.X.bat」→ 选择 [1]</a:t>
+            </a:r>
+          </a:p>
+          <a:p>
+            <a:pPr>
+              <a:spcAft>
+                <a:spcPts val="400"/>
+              </a:spcAft>
+            </a:pPr>
+          </a:p>
+          <a:p>
+            <a:pPr>
+              <a:defRPr sz="2000" b="1">
+                <a:solidFill>
+                  <a:srgbClr val="4FC3F7"/>
+                </a:solidFill>
+              </a:defRPr>
+            </a:pPr>
+            <a:r>
+              <a:t>3  工具自动检测 C 盘数据，执行迁移（数秒完成）</a:t>
+            </a:r>
+          </a:p>
+          <a:p>
+            <a:pPr>
+              <a:spcAft>
+                <a:spcPts val="400"/>
+              </a:spcAft>
+            </a:pPr>
+          </a:p>
+          <a:p>
+            <a:pPr>
+              <a:defRPr sz="2000" b="1">
+                <a:solidFill>
+                  <a:srgbClr val="4FC3F7"/>
+                </a:solidFill>
+              </a:defRPr>
+            </a:pPr>
+            <a:r>
+              <a:t>4  启动新版 Reasonix → 点击「历史对话」</a:t>
+            </a:r>
+          </a:p>
+          <a:p>
+            <a:pPr>
+              <a:spcAft>
+                <a:spcPts val="1000"/>
+              </a:spcAft>
+            </a:pPr>
+          </a:p>
+          <a:p>
+            <a:pPr>
+              <a:spcAft>
+                <a:spcPts val="400"/>
+              </a:spcAft>
+            </a:pPr>
+          </a:p>
+          <a:p>
+            <a:pPr>
+              <a:defRPr sz="2000" b="1">
+                <a:solidFill>
+                  <a:srgbClr val="4FC3F7"/>
+                </a:solidFill>
+              </a:defRPr>
+            </a:pPr>
+            <a:r>
+              <a:t>✅  效果</a:t>
+            </a:r>
+          </a:p>
+          <a:p>
+            <a:pPr>
+              <a:spcAft>
+                <a:spcPts val="200"/>
+              </a:spcAft>
               <a:defRPr sz="1800">
                 <a:solidFill>
-                  <a:srgbClr val="CCCCCC"/>
-                </a:solidFill>
-              </a:defRPr>
-            </a:pPr>
-            <a:r>
-              <a:t>MIT 协议，欢迎 Star / Fork / PR</a:t>
-            </a:r>
-          </a:p>
-          <a:p>
-            <a:pPr algn="ctr">
-              <a:spcAft>
-                <a:spcPts val="400"/>
-              </a:spcAft>
-              <a:defRPr sz="1200">
-                <a:solidFill>
-                  <a:srgbClr val="FFFFFF"/>
-                </a:solidFill>
-              </a:defRPr>
-            </a:pPr>
-          </a:p>
-          <a:p>
-            <a:pPr algn="ctr">
-              <a:spcAft>
-                <a:spcPts val="400"/>
+                  <a:srgbClr val="2D2D3F"/>
+                </a:solidFill>
+              </a:defRPr>
+            </a:pPr>
+            <a:r>
+              <a:t>     侧边栏不受影响（保持新版原生内容）</a:t>
+            </a:r>
+          </a:p>
+          <a:p>
+            <a:pPr>
+              <a:spcAft>
+                <a:spcPts val="200"/>
               </a:spcAft>
               <a:defRPr sz="1800">
                 <a:solidFill>
-                  <a:srgbClr val="FFFFFF"/>
-                </a:solidFill>
-              </a:defRPr>
-            </a:pPr>
-            <a:r>
-              <a:t>仓库包含：</a:t>
-            </a:r>
-          </a:p>
-          <a:p>
-            <a:pPr algn="ctr">
-              <a:spcAft>
-                <a:spcPts val="400"/>
-              </a:spcAft>
-              <a:defRPr sz="1600">
-                <a:solidFill>
-                  <a:srgbClr val="AAAAAA"/>
-                </a:solidFill>
-              </a:defRPr>
-            </a:pPr>
-            <a:r>
-              <a:t>  • 完整源码（bat + ps1）</a:t>
-            </a:r>
-          </a:p>
-          <a:p>
-            <a:pPr algn="ctr">
-              <a:spcAft>
-                <a:spcPts val="400"/>
-              </a:spcAft>
-              <a:defRPr sz="1600">
-                <a:solidFill>
-                  <a:srgbClr val="AAAAAA"/>
-                </a:solidFill>
-              </a:defRPr>
-            </a:pPr>
-            <a:r>
-              <a:t>  • 技术实现文档（中英双语）</a:t>
-            </a:r>
-          </a:p>
-          <a:p>
-            <a:pPr algn="ctr">
-              <a:spcAft>
-                <a:spcPts val="400"/>
-              </a:spcAft>
-              <a:defRPr sz="1600">
-                <a:solidFill>
-                  <a:srgbClr val="AAAAAA"/>
-                </a:solidFill>
-              </a:defRPr>
-            </a:pPr>
-            <a:r>
-              <a:t>  • 研发纪实（踩坑全记录）</a:t>
-            </a:r>
-          </a:p>
-          <a:p>
-            <a:pPr algn="ctr">
-              <a:spcAft>
-                <a:spcPts val="400"/>
-              </a:spcAft>
-              <a:defRPr sz="1600">
-                <a:solidFill>
-                  <a:srgbClr val="AAAAAA"/>
-                </a:solidFill>
-              </a:defRPr>
-            </a:pPr>
-            <a:r>
-              <a:t>  • 微信公众号文章</a:t>
+                  <a:srgbClr val="2D2D3F"/>
+                </a:solidFill>
+              </a:defRPr>
+            </a:pPr>
+            <a:r>
+              <a:t>     历史对话列表显示全部迁移会话，每个保留原标题</a:t>
+            </a:r>
+          </a:p>
+          <a:p>
+            <a:pPr>
+              <a:spcAft>
+                <a:spcPts val="200"/>
+              </a:spcAft>
+              <a:defRPr sz="1800">
+                <a:solidFill>
+                  <a:srgbClr val="2D2D3F"/>
+                </a:solidFill>
+              </a:defRPr>
+            </a:pPr>
+            <a:r>
+              <a:t>     「打开会话」可继续未完成的对话</a:t>
+            </a:r>
+          </a:p>
+          <a:p>
+            <a:pPr>
+              <a:spcAft>
+                <a:spcPts val="200"/>
+              </a:spcAft>
+              <a:defRPr sz="1800">
+                <a:solidFill>
+                  <a:srgbClr val="2D2D3F"/>
+                </a:solidFill>
+              </a:defRPr>
+            </a:pPr>
+            <a:r>
+              <a:t>     对话指标（token/缓存/费用/依赖文件）完整迁移</a:t>
+            </a:r>
+          </a:p>
+        </p:txBody>
+      </p:sp>
+      <p:sp>
+        <p:nvSpPr>
+          <p:cNvPr id="4" name="TextBox 3"/>
+          <p:cNvSpPr txBox="1"/>
+          <p:nvPr/>
+        </p:nvSpPr>
+        <p:spPr>
+          <a:xfrm>
+            <a:off x="457200" y="6400800"/>
+            <a:ext cx="11247120" cy="365760"/>
+          </a:xfrm>
+          <a:prstGeom prst="rect">
+            <a:avLst/>
+          </a:prstGeom>
+          <a:noFill/>
+        </p:spPr>
+        <p:txBody>
+          <a:bodyPr wrap="none">
+            <a:spAutoFit/>
+          </a:bodyPr>
+          <a:lstStyle/>
+          <a:p>
+            <a:pPr algn="r">
+              <a:defRPr sz="1000">
+                <a:solidFill>
+                  <a:srgbClr val="999999"/>
+                </a:solidFill>
+              </a:defRPr>
+            </a:pPr>
+            <a:r>
+              <a:t>Reasonix Migration Assistant  |  github.com/CS-Faith/reasonix-migration-assistant</a:t>
             </a:r>
           </a:p>
         </p:txBody>
